--- a/NEA/Recorded Lectures/1426783_81212_rl1.1.1.pptx
+++ b/NEA/Recorded Lectures/1426783_81212_rl1.1.1.pptx
@@ -5,22 +5,15 @@
     <p:sldMasterId id="2147483668" r:id="rId1"/>
   </p:sldMasterIdLst>
   <p:notesMasterIdLst>
-    <p:notesMasterId r:id="rId12"/>
+    <p:notesMasterId r:id="rId5"/>
   </p:notesMasterIdLst>
   <p:handoutMasterIdLst>
-    <p:handoutMasterId r:id="rId13"/>
+    <p:handoutMasterId r:id="rId6"/>
   </p:handoutMasterIdLst>
   <p:sldIdLst>
-    <p:sldId id="256" r:id="rId2"/>
-    <p:sldId id="269" r:id="rId3"/>
-    <p:sldId id="288" r:id="rId4"/>
-    <p:sldId id="289" r:id="rId5"/>
-    <p:sldId id="290" r:id="rId6"/>
-    <p:sldId id="284" r:id="rId7"/>
-    <p:sldId id="291" r:id="rId8"/>
-    <p:sldId id="292" r:id="rId9"/>
-    <p:sldId id="293" r:id="rId10"/>
-    <p:sldId id="294" r:id="rId11"/>
+    <p:sldId id="288" r:id="rId2"/>
+    <p:sldId id="289" r:id="rId3"/>
+    <p:sldId id="290" r:id="rId4"/>
   </p:sldIdLst>
   <p:sldSz cx="9144000" cy="6858000" type="screen4x3"/>
   <p:notesSz cx="6805613" cy="9944100"/>
@@ -319,7 +312,7 @@
           <a:p>
             <a:fld id="{73BE9B4E-3786-43E4-ADC0-DE2945E09898}" type="datetimeFigureOut">
               <a:rPr lang="en-IN" smtClean="0"/>
-              <a:t>09-07-2019</a:t>
+              <a:t>07-04-2025</a:t>
             </a:fld>
             <a:endParaRPr lang="en-IN"/>
           </a:p>
@@ -980,989 +973,7 @@
 </p:notesMaster>
 </file>
 
-<file path=ppt/notesSlides/notesSlide1.xml><?xml version="1.0" encoding="utf-8"?>
-<p:notes xmlns:a="http://schemas.openxmlformats.org/drawingml/2006/main" xmlns:r="http://schemas.openxmlformats.org/officeDocument/2006/relationships" xmlns:p="http://schemas.openxmlformats.org/presentationml/2006/main" showMasterSp="0" showMasterPhAnim="0">
-  <p:cSld>
-    <p:spTree>
-      <p:nvGrpSpPr>
-        <p:cNvPr id="1" name="Shape 239"/>
-        <p:cNvGrpSpPr/>
-        <p:nvPr/>
-      </p:nvGrpSpPr>
-      <p:grpSpPr>
-        <a:xfrm>
-          <a:off x="0" y="0"/>
-          <a:ext cx="0" cy="0"/>
-          <a:chOff x="0" y="0"/>
-          <a:chExt cx="0" cy="0"/>
-        </a:xfrm>
-      </p:grpSpPr>
-      <p:sp>
-        <p:nvSpPr>
-          <p:cNvPr id="240" name="Shape 240"/>
-          <p:cNvSpPr>
-            <a:spLocks noGrp="1" noRot="1" noChangeAspect="1"/>
-          </p:cNvSpPr>
-          <p:nvPr>
-            <p:ph type="sldImg" idx="2"/>
-          </p:nvPr>
-        </p:nvSpPr>
-        <p:spPr>
-          <a:xfrm>
-            <a:off x="917575" y="746125"/>
-            <a:ext cx="4972050" cy="3729038"/>
-          </a:xfrm>
-          <a:custGeom>
-            <a:avLst/>
-            <a:gdLst/>
-            <a:ahLst/>
-            <a:cxnLst/>
-            <a:rect l="0" t="0" r="0" b="0"/>
-            <a:pathLst>
-              <a:path w="120000" h="120000" extrusionOk="0">
-                <a:moveTo>
-                  <a:pt x="0" y="0"/>
-                </a:moveTo>
-                <a:lnTo>
-                  <a:pt x="120000" y="0"/>
-                </a:lnTo>
-                <a:lnTo>
-                  <a:pt x="120000" y="120000"/>
-                </a:lnTo>
-                <a:lnTo>
-                  <a:pt x="0" y="120000"/>
-                </a:lnTo>
-                <a:close/>
-              </a:path>
-            </a:pathLst>
-          </a:custGeom>
-          <a:noFill/>
-          <a:ln w="12700" cap="flat" cmpd="sng">
-            <a:solidFill>
-              <a:srgbClr val="000000"/>
-            </a:solidFill>
-            <a:prstDash val="solid"/>
-            <a:round/>
-            <a:headEnd type="none" w="med" len="med"/>
-            <a:tailEnd type="none" w="med" len="med"/>
-          </a:ln>
-        </p:spPr>
-      </p:sp>
-      <p:sp>
-        <p:nvSpPr>
-          <p:cNvPr id="241" name="Shape 241"/>
-          <p:cNvSpPr txBox="1">
-            <a:spLocks noGrp="1"/>
-          </p:cNvSpPr>
-          <p:nvPr>
-            <p:ph type="body" idx="1"/>
-          </p:nvPr>
-        </p:nvSpPr>
-        <p:spPr>
-          <a:xfrm>
-            <a:off x="680562" y="4723448"/>
-            <a:ext cx="5444489" cy="4474845"/>
-          </a:xfrm>
-          <a:prstGeom prst="rect">
-            <a:avLst/>
-          </a:prstGeom>
-          <a:noFill/>
-          <a:ln>
-            <a:noFill/>
-          </a:ln>
-        </p:spPr>
-        <p:txBody>
-          <a:bodyPr lIns="91425" tIns="45700" rIns="91425" bIns="45700" anchor="t" anchorCtr="0">
-            <a:noAutofit/>
-          </a:bodyPr>
-          <a:lstStyle/>
-          <a:p>
-            <a:pPr marL="0" marR="0" lvl="0" indent="0" algn="l" rtl="0">
-              <a:spcBef>
-                <a:spcPts val="0"/>
-              </a:spcBef>
-              <a:buSzPct val="25000"/>
-              <a:buNone/>
-            </a:pPr>
-            <a:endParaRPr sz="1200" b="0" i="0" u="none" strike="noStrike" cap="none">
-              <a:solidFill>
-                <a:schemeClr val="dk1"/>
-              </a:solidFill>
-              <a:latin typeface="Calibri"/>
-              <a:ea typeface="Calibri"/>
-              <a:cs typeface="Calibri"/>
-              <a:sym typeface="Calibri"/>
-            </a:endParaRPr>
-          </a:p>
-        </p:txBody>
-      </p:sp>
-      <p:sp>
-        <p:nvSpPr>
-          <p:cNvPr id="242" name="Shape 242"/>
-          <p:cNvSpPr txBox="1">
-            <a:spLocks noGrp="1"/>
-          </p:cNvSpPr>
-          <p:nvPr>
-            <p:ph type="sldNum" idx="12"/>
-          </p:nvPr>
-        </p:nvSpPr>
-        <p:spPr>
-          <a:xfrm>
-            <a:off x="3854939" y="9445168"/>
-            <a:ext cx="2949099" cy="497205"/>
-          </a:xfrm>
-          <a:prstGeom prst="rect">
-            <a:avLst/>
-          </a:prstGeom>
-          <a:noFill/>
-          <a:ln>
-            <a:noFill/>
-          </a:ln>
-        </p:spPr>
-        <p:txBody>
-          <a:bodyPr lIns="91425" tIns="45700" rIns="91425" bIns="45700" anchor="b" anchorCtr="0">
-            <a:noAutofit/>
-          </a:bodyPr>
-          <a:lstStyle/>
-          <a:p>
-            <a:pPr marL="0" marR="0" lvl="0" indent="0" algn="r" rtl="0">
-              <a:spcBef>
-                <a:spcPts val="0"/>
-              </a:spcBef>
-              <a:buSzPct val="25000"/>
-              <a:buNone/>
-            </a:pPr>
-            <a:fld id="{00000000-1234-1234-1234-123412341234}" type="slidenum">
-              <a:rPr lang="en-US" sz="1200" b="0" i="0" u="none" strike="noStrike" cap="none">
-                <a:solidFill>
-                  <a:srgbClr val="000000"/>
-                </a:solidFill>
-                <a:latin typeface="Calibri"/>
-                <a:ea typeface="Calibri"/>
-                <a:cs typeface="Calibri"/>
-                <a:sym typeface="Calibri"/>
-              </a:rPr>
-              <a:t>1</a:t>
-            </a:fld>
-            <a:endParaRPr lang="en-US" sz="1200" b="0" i="0" u="none" strike="noStrike" cap="none">
-              <a:solidFill>
-                <a:srgbClr val="000000"/>
-              </a:solidFill>
-              <a:latin typeface="Calibri"/>
-              <a:ea typeface="Calibri"/>
-              <a:cs typeface="Calibri"/>
-              <a:sym typeface="Calibri"/>
-            </a:endParaRPr>
-          </a:p>
-        </p:txBody>
-      </p:sp>
-    </p:spTree>
-  </p:cSld>
-  <p:clrMapOvr>
-    <a:masterClrMapping/>
-  </p:clrMapOvr>
-</p:notes>
-</file>
-
 <file path=ppt/slideLayouts/slideLayout1.xml><?xml version="1.0" encoding="utf-8"?>
-<p:sldLayout xmlns:a="http://schemas.openxmlformats.org/drawingml/2006/main" xmlns:r="http://schemas.openxmlformats.org/officeDocument/2006/relationships" xmlns:p="http://schemas.openxmlformats.org/presentationml/2006/main">
-  <p:cSld name="Custom Layout">
-    <p:spTree>
-      <p:nvGrpSpPr>
-        <p:cNvPr id="1" name="Shape 188"/>
-        <p:cNvGrpSpPr/>
-        <p:nvPr/>
-      </p:nvGrpSpPr>
-      <p:grpSpPr>
-        <a:xfrm>
-          <a:off x="0" y="0"/>
-          <a:ext cx="0" cy="0"/>
-          <a:chOff x="0" y="0"/>
-          <a:chExt cx="0" cy="0"/>
-        </a:xfrm>
-      </p:grpSpPr>
-      <p:pic>
-        <p:nvPicPr>
-          <p:cNvPr id="189" name="Shape 189" descr="\\Server\D\jyoti\FI023_BITS_v1\styleguide img\IMG_5627_b.jpg"/>
-          <p:cNvPicPr preferRelativeResize="0"/>
-          <p:nvPr/>
-        </p:nvPicPr>
-        <p:blipFill rotWithShape="1">
-          <a:blip r:embed="rId2">
-            <a:alphaModFix/>
-          </a:blip>
-          <a:srcRect/>
-          <a:stretch/>
-        </p:blipFill>
-        <p:spPr>
-          <a:xfrm>
-            <a:off x="15" y="17"/>
-            <a:ext cx="9142380" cy="6882117"/>
-          </a:xfrm>
-          <a:prstGeom prst="rect">
-            <a:avLst/>
-          </a:prstGeom>
-          <a:noFill/>
-          <a:ln>
-            <a:noFill/>
-          </a:ln>
-        </p:spPr>
-      </p:pic>
-      <p:sp>
-        <p:nvSpPr>
-          <p:cNvPr id="190" name="Shape 190"/>
-          <p:cNvSpPr/>
-          <p:nvPr/>
-        </p:nvSpPr>
-        <p:spPr>
-          <a:xfrm>
-            <a:off x="0" y="4253985"/>
-            <a:ext cx="9144000" cy="2628136"/>
-          </a:xfrm>
-          <a:prstGeom prst="rect">
-            <a:avLst/>
-          </a:prstGeom>
-          <a:solidFill>
-            <a:schemeClr val="lt1"/>
-          </a:solidFill>
-          <a:ln>
-            <a:noFill/>
-          </a:ln>
-        </p:spPr>
-        <p:txBody>
-          <a:bodyPr lIns="93125" tIns="46550" rIns="93125" bIns="46550" anchor="ctr" anchorCtr="0">
-            <a:noAutofit/>
-          </a:bodyPr>
-          <a:lstStyle/>
-          <a:p>
-            <a:pPr marL="0" marR="0" lvl="0" indent="0" algn="ctr" rtl="0">
-              <a:spcBef>
-                <a:spcPts val="0"/>
-              </a:spcBef>
-              <a:spcAft>
-                <a:spcPts val="0"/>
-              </a:spcAft>
-              <a:buNone/>
-            </a:pPr>
-            <a:endParaRPr sz="1600" b="0" i="0" u="none" strike="noStrike" cap="none">
-              <a:solidFill>
-                <a:srgbClr val="FFFFFF"/>
-              </a:solidFill>
-              <a:latin typeface="Arial"/>
-              <a:ea typeface="Arial"/>
-              <a:cs typeface="Arial"/>
-              <a:sym typeface="Arial"/>
-            </a:endParaRPr>
-          </a:p>
-        </p:txBody>
-      </p:sp>
-      <p:pic>
-        <p:nvPicPr>
-          <p:cNvPr id="191" name="Shape 191" descr="Picture 7.png"/>
-          <p:cNvPicPr preferRelativeResize="0"/>
-          <p:nvPr/>
-        </p:nvPicPr>
-        <p:blipFill rotWithShape="1">
-          <a:blip r:embed="rId3">
-            <a:alphaModFix/>
-          </a:blip>
-          <a:srcRect l="1923" b="5335"/>
-          <a:stretch/>
-        </p:blipFill>
-        <p:spPr>
-          <a:xfrm>
-            <a:off x="6764470" y="15"/>
-            <a:ext cx="2237873" cy="706766"/>
-          </a:xfrm>
-          <a:prstGeom prst="rect">
-            <a:avLst/>
-          </a:prstGeom>
-          <a:noFill/>
-          <a:ln>
-            <a:noFill/>
-          </a:ln>
-        </p:spPr>
-      </p:pic>
-      <p:grpSp>
-        <p:nvGrpSpPr>
-          <p:cNvPr id="195" name="Shape 195"/>
-          <p:cNvGrpSpPr/>
-          <p:nvPr/>
-        </p:nvGrpSpPr>
-        <p:grpSpPr>
-          <a:xfrm>
-            <a:off x="6778635" y="691752"/>
-            <a:ext cx="2254818" cy="699729"/>
-            <a:chOff x="76200" y="2209800"/>
-            <a:chExt cx="2209799" cy="685799"/>
-          </a:xfrm>
-        </p:grpSpPr>
-        <p:sp>
-          <p:nvSpPr>
-            <p:cNvPr id="196" name="Shape 196"/>
-            <p:cNvSpPr txBox="1"/>
-            <p:nvPr/>
-          </p:nvSpPr>
-          <p:spPr>
-            <a:xfrm>
-              <a:off x="76200" y="2209800"/>
-              <a:ext cx="2209799" cy="553997"/>
-            </a:xfrm>
-            <a:prstGeom prst="rect">
-              <a:avLst/>
-            </a:prstGeom>
-            <a:noFill/>
-            <a:ln>
-              <a:noFill/>
-            </a:ln>
-          </p:spPr>
-          <p:txBody>
-            <a:bodyPr lIns="91425" tIns="45700" rIns="91425" bIns="45700" anchor="t" anchorCtr="0">
-              <a:noAutofit/>
-            </a:bodyPr>
-            <a:lstStyle/>
-            <a:p>
-              <a:pPr marL="0" marR="0" lvl="0" indent="0" algn="ctr" rtl="0">
-                <a:spcBef>
-                  <a:spcPts val="0"/>
-                </a:spcBef>
-                <a:spcAft>
-                  <a:spcPts val="0"/>
-                </a:spcAft>
-                <a:buSzPct val="25000"/>
-                <a:buNone/>
-              </a:pPr>
-              <a:r>
-                <a:rPr lang="en-US" sz="3000" b="1" i="0" u="none" strike="noStrike" cap="none" dirty="0">
-                  <a:solidFill>
-                    <a:srgbClr val="FFFFFF"/>
-                  </a:solidFill>
-                  <a:latin typeface="Arial"/>
-                  <a:ea typeface="Arial"/>
-                  <a:cs typeface="Arial"/>
-                  <a:sym typeface="Arial"/>
-                </a:rPr>
-                <a:t>BITS</a:t>
-              </a:r>
-              <a:r>
-                <a:rPr lang="en-US" sz="3000" b="0" i="0" u="none" strike="noStrike" cap="none" dirty="0">
-                  <a:solidFill>
-                    <a:srgbClr val="FFFFFF"/>
-                  </a:solidFill>
-                  <a:latin typeface="Arial"/>
-                  <a:ea typeface="Arial"/>
-                  <a:cs typeface="Arial"/>
-                  <a:sym typeface="Arial"/>
-                </a:rPr>
-                <a:t> Pilani</a:t>
-              </a:r>
-            </a:p>
-          </p:txBody>
-        </p:sp>
-        <p:sp>
-          <p:nvSpPr>
-            <p:cNvPr id="197" name="Shape 197"/>
-            <p:cNvSpPr txBox="1"/>
-            <p:nvPr/>
-          </p:nvSpPr>
-          <p:spPr>
-            <a:xfrm>
-              <a:off x="228600" y="2664767"/>
-              <a:ext cx="1904999" cy="230832"/>
-            </a:xfrm>
-            <a:prstGeom prst="rect">
-              <a:avLst/>
-            </a:prstGeom>
-            <a:noFill/>
-            <a:ln>
-              <a:noFill/>
-            </a:ln>
-          </p:spPr>
-          <p:txBody>
-            <a:bodyPr lIns="91425" tIns="45700" rIns="91425" bIns="45700" anchor="t" anchorCtr="0">
-              <a:noAutofit/>
-            </a:bodyPr>
-            <a:lstStyle/>
-            <a:p>
-              <a:pPr marL="0" marR="0" lvl="0" indent="0" algn="ctr" rtl="0">
-                <a:spcBef>
-                  <a:spcPts val="0"/>
-                </a:spcBef>
-                <a:spcAft>
-                  <a:spcPts val="0"/>
-                </a:spcAft>
-                <a:buSzPct val="25000"/>
-                <a:buNone/>
-              </a:pPr>
-              <a:r>
-                <a:rPr lang="en-US" sz="900" b="0" i="0" u="none" strike="noStrike" cap="none">
-                  <a:solidFill>
-                    <a:srgbClr val="FFFFFF"/>
-                  </a:solidFill>
-                  <a:latin typeface="Arial"/>
-                  <a:ea typeface="Arial"/>
-                  <a:cs typeface="Arial"/>
-                  <a:sym typeface="Arial"/>
-                </a:rPr>
-                <a:t>Pilani | Dubai | Goa | Hyderabad</a:t>
-              </a:r>
-            </a:p>
-          </p:txBody>
-        </p:sp>
-      </p:grpSp>
-      <p:sp>
-        <p:nvSpPr>
-          <p:cNvPr id="198" name="Shape 198"/>
-          <p:cNvSpPr txBox="1">
-            <a:spLocks noGrp="1"/>
-          </p:cNvSpPr>
-          <p:nvPr>
-            <p:ph type="ctrTitle"/>
-          </p:nvPr>
-        </p:nvSpPr>
-        <p:spPr>
-          <a:xfrm>
-            <a:off x="320728" y="5237530"/>
-            <a:ext cx="6199129" cy="1051102"/>
-          </a:xfrm>
-          <a:prstGeom prst="rect">
-            <a:avLst/>
-          </a:prstGeom>
-          <a:noFill/>
-          <a:ln>
-            <a:noFill/>
-          </a:ln>
-        </p:spPr>
-        <p:txBody>
-          <a:bodyPr lIns="91425" tIns="91425" rIns="91425" bIns="91425" anchor="b" anchorCtr="0"/>
-          <a:lstStyle>
-            <a:lvl1pPr marL="0" marR="0" lvl="0" indent="0" algn="l" rtl="0">
-              <a:spcBef>
-                <a:spcPts val="0"/>
-              </a:spcBef>
-              <a:spcAft>
-                <a:spcPts val="0"/>
-              </a:spcAft>
-              <a:defRPr/>
-            </a:lvl1pPr>
-            <a:lvl2pPr marL="0" marR="0" lvl="1" indent="0" algn="l" rtl="0">
-              <a:spcBef>
-                <a:spcPts val="0"/>
-              </a:spcBef>
-              <a:spcAft>
-                <a:spcPts val="0"/>
-              </a:spcAft>
-              <a:defRPr/>
-            </a:lvl2pPr>
-            <a:lvl3pPr marL="0" marR="0" lvl="2" indent="0" algn="l" rtl="0">
-              <a:spcBef>
-                <a:spcPts val="0"/>
-              </a:spcBef>
-              <a:spcAft>
-                <a:spcPts val="0"/>
-              </a:spcAft>
-              <a:defRPr/>
-            </a:lvl3pPr>
-            <a:lvl4pPr marL="0" marR="0" lvl="3" indent="0" algn="l" rtl="0">
-              <a:spcBef>
-                <a:spcPts val="0"/>
-              </a:spcBef>
-              <a:spcAft>
-                <a:spcPts val="0"/>
-              </a:spcAft>
-              <a:defRPr/>
-            </a:lvl4pPr>
-            <a:lvl5pPr marL="0" marR="0" lvl="4" indent="0" algn="l" rtl="0">
-              <a:spcBef>
-                <a:spcPts val="0"/>
-              </a:spcBef>
-              <a:spcAft>
-                <a:spcPts val="0"/>
-              </a:spcAft>
-              <a:defRPr/>
-            </a:lvl5pPr>
-            <a:lvl6pPr marL="465681" marR="0" lvl="5" indent="-8481" algn="l" rtl="0">
-              <a:spcBef>
-                <a:spcPts val="0"/>
-              </a:spcBef>
-              <a:spcAft>
-                <a:spcPts val="0"/>
-              </a:spcAft>
-              <a:defRPr/>
-            </a:lvl6pPr>
-            <a:lvl7pPr marL="931383" marR="0" lvl="6" indent="-4282" algn="l" rtl="0">
-              <a:spcBef>
-                <a:spcPts val="0"/>
-              </a:spcBef>
-              <a:spcAft>
-                <a:spcPts val="0"/>
-              </a:spcAft>
-              <a:defRPr/>
-            </a:lvl7pPr>
-            <a:lvl8pPr marL="1397075" marR="0" lvl="7" indent="-74" algn="l" rtl="0">
-              <a:spcBef>
-                <a:spcPts val="0"/>
-              </a:spcBef>
-              <a:spcAft>
-                <a:spcPts val="0"/>
-              </a:spcAft>
-              <a:defRPr/>
-            </a:lvl8pPr>
-            <a:lvl9pPr marL="1862760" marR="0" lvl="8" indent="-8560" algn="l" rtl="0">
-              <a:spcBef>
-                <a:spcPts val="0"/>
-              </a:spcBef>
-              <a:spcAft>
-                <a:spcPts val="0"/>
-              </a:spcAft>
-              <a:defRPr/>
-            </a:lvl9pPr>
-          </a:lstStyle>
-          <a:p>
-            <a:endParaRPr dirty="0"/>
-          </a:p>
-        </p:txBody>
-      </p:sp>
-      <p:grpSp>
-        <p:nvGrpSpPr>
-          <p:cNvPr id="13" name="Group 12"/>
-          <p:cNvGrpSpPr/>
-          <p:nvPr userDrawn="1"/>
-        </p:nvGrpSpPr>
-        <p:grpSpPr>
-          <a:xfrm>
-            <a:off x="1" y="6814184"/>
-            <a:ext cx="9144000" cy="72389"/>
-            <a:chOff x="1998227" y="6500996"/>
-            <a:chExt cx="7153215" cy="46648"/>
-          </a:xfrm>
-        </p:grpSpPr>
-        <p:sp>
-          <p:nvSpPr>
-            <p:cNvPr id="14" name="Shape 170"/>
-            <p:cNvSpPr/>
-            <p:nvPr/>
-          </p:nvSpPr>
-          <p:spPr>
-            <a:xfrm>
-              <a:off x="4408551" y="6500996"/>
-              <a:ext cx="2376028" cy="46648"/>
-            </a:xfrm>
-            <a:prstGeom prst="rect">
-              <a:avLst/>
-            </a:prstGeom>
-            <a:solidFill>
-              <a:srgbClr val="76C2E5"/>
-            </a:solidFill>
-            <a:ln>
-              <a:noFill/>
-            </a:ln>
-          </p:spPr>
-          <p:txBody>
-            <a:bodyPr lIns="93125" tIns="46550" rIns="93125" bIns="46550" anchor="ctr" anchorCtr="0">
-              <a:noAutofit/>
-            </a:bodyPr>
-            <a:lstStyle/>
-            <a:p>
-              <a:pPr marL="0" marR="0" lvl="0" indent="0" algn="ctr" rtl="0">
-                <a:spcBef>
-                  <a:spcPts val="0"/>
-                </a:spcBef>
-                <a:spcAft>
-                  <a:spcPts val="0"/>
-                </a:spcAft>
-                <a:buNone/>
-              </a:pPr>
-              <a:endParaRPr sz="1600" b="0" i="0" u="none" strike="noStrike" cap="none">
-                <a:solidFill>
-                  <a:srgbClr val="FFFFFF"/>
-                </a:solidFill>
-                <a:latin typeface="Arial"/>
-                <a:ea typeface="Arial"/>
-                <a:cs typeface="Arial"/>
-                <a:sym typeface="Arial"/>
-              </a:endParaRPr>
-            </a:p>
-          </p:txBody>
-        </p:sp>
-        <p:sp>
-          <p:nvSpPr>
-            <p:cNvPr id="15" name="Shape 171"/>
-            <p:cNvSpPr/>
-            <p:nvPr/>
-          </p:nvSpPr>
-          <p:spPr>
-            <a:xfrm>
-              <a:off x="1998227" y="6500996"/>
-              <a:ext cx="2410322" cy="46648"/>
-            </a:xfrm>
-            <a:prstGeom prst="rect">
-              <a:avLst/>
-            </a:prstGeom>
-            <a:solidFill>
-              <a:srgbClr val="FCB017"/>
-            </a:solidFill>
-            <a:ln>
-              <a:noFill/>
-            </a:ln>
-          </p:spPr>
-          <p:txBody>
-            <a:bodyPr lIns="93125" tIns="46550" rIns="93125" bIns="46550" anchor="ctr" anchorCtr="0">
-              <a:noAutofit/>
-            </a:bodyPr>
-            <a:lstStyle/>
-            <a:p>
-              <a:pPr marL="0" marR="0" lvl="0" indent="0" algn="ctr" rtl="0">
-                <a:spcBef>
-                  <a:spcPts val="0"/>
-                </a:spcBef>
-                <a:spcAft>
-                  <a:spcPts val="0"/>
-                </a:spcAft>
-                <a:buNone/>
-              </a:pPr>
-              <a:endParaRPr sz="1600" b="0" i="0" u="none" strike="noStrike" cap="none">
-                <a:solidFill>
-                  <a:srgbClr val="FFFFFF"/>
-                </a:solidFill>
-                <a:latin typeface="Arial"/>
-                <a:ea typeface="Arial"/>
-                <a:cs typeface="Arial"/>
-                <a:sym typeface="Arial"/>
-              </a:endParaRPr>
-            </a:p>
-          </p:txBody>
-        </p:sp>
-        <p:sp>
-          <p:nvSpPr>
-            <p:cNvPr id="16" name="Shape 172"/>
-            <p:cNvSpPr/>
-            <p:nvPr/>
-          </p:nvSpPr>
-          <p:spPr>
-            <a:xfrm>
-              <a:off x="6775414" y="6500996"/>
-              <a:ext cx="2376028" cy="46648"/>
-            </a:xfrm>
-            <a:prstGeom prst="rect">
-              <a:avLst/>
-            </a:prstGeom>
-            <a:solidFill>
-              <a:srgbClr val="FF0000"/>
-            </a:solidFill>
-            <a:ln>
-              <a:noFill/>
-            </a:ln>
-          </p:spPr>
-          <p:txBody>
-            <a:bodyPr lIns="93125" tIns="46550" rIns="93125" bIns="46550" anchor="ctr" anchorCtr="0">
-              <a:noAutofit/>
-            </a:bodyPr>
-            <a:lstStyle/>
-            <a:p>
-              <a:pPr marL="0" marR="0" lvl="0" indent="0" algn="ctr" rtl="0">
-                <a:spcBef>
-                  <a:spcPts val="0"/>
-                </a:spcBef>
-                <a:spcAft>
-                  <a:spcPts val="0"/>
-                </a:spcAft>
-                <a:buNone/>
-              </a:pPr>
-              <a:endParaRPr sz="1600" b="0" i="0" u="none" strike="noStrike" cap="none">
-                <a:solidFill>
-                  <a:srgbClr val="FFFFFF"/>
-                </a:solidFill>
-                <a:latin typeface="Arial"/>
-                <a:ea typeface="Arial"/>
-                <a:cs typeface="Arial"/>
-                <a:sym typeface="Arial"/>
-              </a:endParaRPr>
-            </a:p>
-          </p:txBody>
-        </p:sp>
-      </p:grpSp>
-      <p:sp>
-        <p:nvSpPr>
-          <p:cNvPr id="17" name="Shape 198"/>
-          <p:cNvSpPr txBox="1">
-            <a:spLocks/>
-          </p:cNvSpPr>
-          <p:nvPr userDrawn="1"/>
-        </p:nvSpPr>
-        <p:spPr>
-          <a:xfrm>
-            <a:off x="320728" y="4374693"/>
-            <a:ext cx="6199129" cy="858385"/>
-          </a:xfrm>
-          <a:prstGeom prst="rect">
-            <a:avLst/>
-          </a:prstGeom>
-          <a:noFill/>
-          <a:ln>
-            <a:noFill/>
-          </a:ln>
-        </p:spPr>
-        <p:txBody>
-          <a:bodyPr lIns="91425" tIns="91425" rIns="91425" bIns="91425" anchor="b" anchorCtr="0"/>
-          <a:lstStyle>
-            <a:defPPr marR="0" lvl="0" algn="l" rtl="0">
-              <a:lnSpc>
-                <a:spcPct val="100000"/>
-              </a:lnSpc>
-              <a:spcBef>
-                <a:spcPts val="0"/>
-              </a:spcBef>
-              <a:spcAft>
-                <a:spcPts val="0"/>
-              </a:spcAft>
-            </a:defPPr>
-            <a:lvl1pPr marL="0" marR="0" lvl="0" indent="0" algn="l" rtl="0">
-              <a:lnSpc>
-                <a:spcPct val="100000"/>
-              </a:lnSpc>
-              <a:spcBef>
-                <a:spcPts val="0"/>
-              </a:spcBef>
-              <a:spcAft>
-                <a:spcPts val="0"/>
-              </a:spcAft>
-              <a:buNone/>
-              <a:defRPr sz="1400" b="0" i="0" u="none" strike="noStrike" cap="none">
-                <a:solidFill>
-                  <a:srgbClr val="000000"/>
-                </a:solidFill>
-                <a:latin typeface="Arial"/>
-                <a:ea typeface="Arial"/>
-                <a:cs typeface="Arial"/>
-                <a:sym typeface="Arial"/>
-              </a:defRPr>
-            </a:lvl1pPr>
-            <a:lvl2pPr marL="0" marR="0" lvl="1" indent="0" algn="l" rtl="0">
-              <a:spcBef>
-                <a:spcPts val="0"/>
-              </a:spcBef>
-              <a:spcAft>
-                <a:spcPts val="0"/>
-              </a:spcAft>
-              <a:defRPr/>
-            </a:lvl2pPr>
-            <a:lvl3pPr marL="0" marR="0" lvl="2" indent="0" algn="l" rtl="0">
-              <a:spcBef>
-                <a:spcPts val="0"/>
-              </a:spcBef>
-              <a:spcAft>
-                <a:spcPts val="0"/>
-              </a:spcAft>
-              <a:defRPr/>
-            </a:lvl3pPr>
-            <a:lvl4pPr marL="0" marR="0" lvl="3" indent="0" algn="l" rtl="0">
-              <a:spcBef>
-                <a:spcPts val="0"/>
-              </a:spcBef>
-              <a:spcAft>
-                <a:spcPts val="0"/>
-              </a:spcAft>
-              <a:defRPr/>
-            </a:lvl4pPr>
-            <a:lvl5pPr marL="0" marR="0" lvl="4" indent="0" algn="l" rtl="0">
-              <a:spcBef>
-                <a:spcPts val="0"/>
-              </a:spcBef>
-              <a:spcAft>
-                <a:spcPts val="0"/>
-              </a:spcAft>
-              <a:defRPr/>
-            </a:lvl5pPr>
-            <a:lvl6pPr marL="465681" marR="0" lvl="5" indent="-8481" algn="l" rtl="0">
-              <a:spcBef>
-                <a:spcPts val="0"/>
-              </a:spcBef>
-              <a:spcAft>
-                <a:spcPts val="0"/>
-              </a:spcAft>
-              <a:defRPr/>
-            </a:lvl6pPr>
-            <a:lvl7pPr marL="931383" marR="0" lvl="6" indent="-4282" algn="l" rtl="0">
-              <a:spcBef>
-                <a:spcPts val="0"/>
-              </a:spcBef>
-              <a:spcAft>
-                <a:spcPts val="0"/>
-              </a:spcAft>
-              <a:defRPr/>
-            </a:lvl7pPr>
-            <a:lvl8pPr marL="1397075" marR="0" lvl="7" indent="-74" algn="l" rtl="0">
-              <a:spcBef>
-                <a:spcPts val="0"/>
-              </a:spcBef>
-              <a:spcAft>
-                <a:spcPts val="0"/>
-              </a:spcAft>
-              <a:defRPr/>
-            </a:lvl8pPr>
-            <a:lvl9pPr marL="1862760" marR="0" lvl="8" indent="-8560" algn="l" rtl="0">
-              <a:spcBef>
-                <a:spcPts val="0"/>
-              </a:spcBef>
-              <a:spcAft>
-                <a:spcPts val="0"/>
-              </a:spcAft>
-              <a:defRPr/>
-            </a:lvl9pPr>
-          </a:lstStyle>
-          <a:p>
-            <a:endParaRPr lang="en-IN" dirty="0"/>
-          </a:p>
-        </p:txBody>
-      </p:sp>
-    </p:spTree>
-  </p:cSld>
-  <p:clrMapOvr>
-    <a:masterClrMapping/>
-  </p:clrMapOvr>
-</p:sldLayout>
-</file>
-
-<file path=ppt/slideLayouts/slideLayout2.xml><?xml version="1.0" encoding="utf-8"?>
-<p:sldLayout xmlns:a="http://schemas.openxmlformats.org/drawingml/2006/main" xmlns:r="http://schemas.openxmlformats.org/officeDocument/2006/relationships" xmlns:p="http://schemas.openxmlformats.org/presentationml/2006/main" type="titleOnly">
-  <p:cSld name="Title Only">
-    <p:spTree>
-      <p:nvGrpSpPr>
-        <p:cNvPr id="1" name="Shape 173"/>
-        <p:cNvGrpSpPr/>
-        <p:nvPr/>
-      </p:nvGrpSpPr>
-      <p:grpSpPr>
-        <a:xfrm>
-          <a:off x="0" y="0"/>
-          <a:ext cx="0" cy="0"/>
-          <a:chOff x="0" y="0"/>
-          <a:chExt cx="0" cy="0"/>
-        </a:xfrm>
-      </p:grpSpPr>
-      <p:sp>
-        <p:nvSpPr>
-          <p:cNvPr id="174" name="Shape 174"/>
-          <p:cNvSpPr txBox="1">
-            <a:spLocks noGrp="1"/>
-          </p:cNvSpPr>
-          <p:nvPr>
-            <p:ph type="title"/>
-          </p:nvPr>
-        </p:nvSpPr>
-        <p:spPr>
-          <a:xfrm>
-            <a:off x="121505" y="260796"/>
-            <a:ext cx="6526336" cy="596653"/>
-          </a:xfrm>
-          <a:prstGeom prst="rect">
-            <a:avLst/>
-          </a:prstGeom>
-          <a:noFill/>
-          <a:ln>
-            <a:noFill/>
-          </a:ln>
-        </p:spPr>
-        <p:txBody>
-          <a:bodyPr lIns="91425" tIns="91425" rIns="91425" bIns="91425" anchor="b" anchorCtr="0"/>
-          <a:lstStyle>
-            <a:lvl1pPr lvl="0" algn="l" rtl="0">
-              <a:spcBef>
-                <a:spcPts val="0"/>
-              </a:spcBef>
-              <a:spcAft>
-                <a:spcPts val="0"/>
-              </a:spcAft>
-              <a:defRPr/>
-            </a:lvl1pPr>
-            <a:lvl2pPr lvl="1" algn="l" rtl="0">
-              <a:spcBef>
-                <a:spcPts val="0"/>
-              </a:spcBef>
-              <a:spcAft>
-                <a:spcPts val="0"/>
-              </a:spcAft>
-              <a:defRPr/>
-            </a:lvl2pPr>
-            <a:lvl3pPr lvl="2" algn="l" rtl="0">
-              <a:spcBef>
-                <a:spcPts val="0"/>
-              </a:spcBef>
-              <a:spcAft>
-                <a:spcPts val="0"/>
-              </a:spcAft>
-              <a:defRPr/>
-            </a:lvl3pPr>
-            <a:lvl4pPr lvl="3" algn="l" rtl="0">
-              <a:spcBef>
-                <a:spcPts val="0"/>
-              </a:spcBef>
-              <a:spcAft>
-                <a:spcPts val="0"/>
-              </a:spcAft>
-              <a:defRPr/>
-            </a:lvl4pPr>
-            <a:lvl5pPr lvl="4" algn="l" rtl="0">
-              <a:spcBef>
-                <a:spcPts val="0"/>
-              </a:spcBef>
-              <a:spcAft>
-                <a:spcPts val="0"/>
-              </a:spcAft>
-              <a:defRPr/>
-            </a:lvl5pPr>
-            <a:lvl6pPr marL="465681" lvl="5" algn="l" rtl="0">
-              <a:spcBef>
-                <a:spcPts val="0"/>
-              </a:spcBef>
-              <a:spcAft>
-                <a:spcPts val="0"/>
-              </a:spcAft>
-              <a:defRPr/>
-            </a:lvl6pPr>
-            <a:lvl7pPr marL="931383" lvl="6" algn="l" rtl="0">
-              <a:spcBef>
-                <a:spcPts val="0"/>
-              </a:spcBef>
-              <a:spcAft>
-                <a:spcPts val="0"/>
-              </a:spcAft>
-              <a:defRPr/>
-            </a:lvl7pPr>
-            <a:lvl8pPr marL="1397075" lvl="7" algn="l" rtl="0">
-              <a:spcBef>
-                <a:spcPts val="0"/>
-              </a:spcBef>
-              <a:spcAft>
-                <a:spcPts val="0"/>
-              </a:spcAft>
-              <a:defRPr/>
-            </a:lvl8pPr>
-            <a:lvl9pPr marL="1862760" lvl="8" algn="l" rtl="0">
-              <a:spcBef>
-                <a:spcPts val="0"/>
-              </a:spcBef>
-              <a:spcAft>
-                <a:spcPts val="0"/>
-              </a:spcAft>
-              <a:defRPr/>
-            </a:lvl9pPr>
-          </a:lstStyle>
-          <a:p>
-            <a:endParaRPr/>
-          </a:p>
-        </p:txBody>
-      </p:sp>
-    </p:spTree>
-  </p:cSld>
-  <p:clrMapOvr>
-    <a:masterClrMapping/>
-  </p:clrMapOvr>
-</p:sldLayout>
-</file>
-
-<file path=ppt/slideLayouts/slideLayout3.xml><?xml version="1.0" encoding="utf-8"?>
 <p:sldLayout xmlns:a="http://schemas.openxmlformats.org/drawingml/2006/main" xmlns:r="http://schemas.openxmlformats.org/officeDocument/2006/relationships" xmlns:p="http://schemas.openxmlformats.org/presentationml/2006/main">
   <p:cSld name="Title Slide">
     <p:bg>
@@ -2094,7 +1105,7 @@
 </p:sldLayout>
 </file>
 
-<file path=ppt/slideLayouts/slideLayout4.xml><?xml version="1.0" encoding="utf-8"?>
+<file path=ppt/slideLayouts/slideLayout2.xml><?xml version="1.0" encoding="utf-8"?>
 <p:sldLayout xmlns:a="http://schemas.openxmlformats.org/drawingml/2006/main" xmlns:r="http://schemas.openxmlformats.org/officeDocument/2006/relationships" xmlns:p="http://schemas.openxmlformats.org/presentationml/2006/main" type="obj">
   <p:cSld name="Title and Content">
     <p:spTree>
@@ -2206,7 +1217,7 @@
             </a:pPr>
             <a:fld id="{89D2B54D-D235-4FDA-A4BC-DA55A0289DFA}" type="datetime1">
               <a:rPr lang="en-US" altLang="en-US" smtClean="0"/>
-              <a:t>7/9/2019</a:t>
+              <a:t>4/7/2025</a:t>
             </a:fld>
             <a:endParaRPr lang="en-US" altLang="en-US"/>
           </a:p>
@@ -2782,7 +1793,7 @@
           <p:nvPr userDrawn="1"/>
         </p:nvPicPr>
         <p:blipFill rotWithShape="1">
-          <a:blip r:embed="rId6">
+          <a:blip r:embed="rId4">
             <a:alphaModFix/>
           </a:blip>
           <a:srcRect t="2" b="28592"/>
@@ -2868,10 +1879,8 @@
   </p:cSld>
   <p:clrMap bg1="lt1" tx1="dk1" bg2="dk2" tx2="lt2" accent1="accent1" accent2="accent2" accent3="accent3" accent4="accent4" accent5="accent5" accent6="accent6" hlink="hlink" folHlink="folHlink"/>
   <p:sldLayoutIdLst>
-    <p:sldLayoutId id="2147483663" r:id="rId1"/>
-    <p:sldLayoutId id="2147483661" r:id="rId2"/>
-    <p:sldLayoutId id="2147483669" r:id="rId3"/>
-    <p:sldLayoutId id="2147483670" r:id="rId4"/>
+    <p:sldLayoutId id="2147483669" r:id="rId1"/>
+    <p:sldLayoutId id="2147483670" r:id="rId2"/>
   </p:sldLayoutIdLst>
   <p:hf sldNum="0" hdr="0" ftr="0" dt="0"/>
   <p:txStyles>
@@ -3318,1315 +2327,6 @@
 </file>
 
 <file path=ppt/slides/slide1.xml><?xml version="1.0" encoding="utf-8"?>
-<p:sld xmlns:a="http://schemas.openxmlformats.org/drawingml/2006/main" xmlns:r="http://schemas.openxmlformats.org/officeDocument/2006/relationships" xmlns:p="http://schemas.openxmlformats.org/presentationml/2006/main">
-  <p:cSld>
-    <p:spTree>
-      <p:nvGrpSpPr>
-        <p:cNvPr id="1" name="Shape 243"/>
-        <p:cNvGrpSpPr/>
-        <p:nvPr/>
-      </p:nvGrpSpPr>
-      <p:grpSpPr>
-        <a:xfrm>
-          <a:off x="0" y="0"/>
-          <a:ext cx="0" cy="0"/>
-          <a:chOff x="0" y="0"/>
-          <a:chExt cx="0" cy="0"/>
-        </a:xfrm>
-      </p:grpSpPr>
-      <p:sp>
-        <p:nvSpPr>
-          <p:cNvPr id="244" name="Shape 244"/>
-          <p:cNvSpPr txBox="1">
-            <a:spLocks noGrp="1"/>
-          </p:cNvSpPr>
-          <p:nvPr>
-            <p:ph type="ctrTitle"/>
-          </p:nvPr>
-        </p:nvSpPr>
-        <p:spPr>
-          <a:xfrm>
-            <a:off x="273103" y="4570780"/>
-            <a:ext cx="7305708" cy="1434604"/>
-          </a:xfrm>
-          <a:prstGeom prst="rect">
-            <a:avLst/>
-          </a:prstGeom>
-          <a:noFill/>
-          <a:ln>
-            <a:noFill/>
-          </a:ln>
-        </p:spPr>
-        <p:txBody>
-          <a:bodyPr lIns="91400" tIns="45700" rIns="91400" bIns="45700" anchor="ctr" anchorCtr="0">
-            <a:noAutofit/>
-          </a:bodyPr>
-          <a:lstStyle/>
-          <a:p>
-            <a:pPr marL="0" marR="0" lvl="0" indent="0" rtl="0">
-              <a:lnSpc>
-                <a:spcPct val="111111"/>
-              </a:lnSpc>
-              <a:spcBef>
-                <a:spcPts val="0"/>
-              </a:spcBef>
-              <a:buClr>
-                <a:schemeClr val="lt1"/>
-              </a:buClr>
-              <a:buSzPct val="25000"/>
-              <a:buFont typeface="Arial"/>
-              <a:buNone/>
-            </a:pPr>
-            <a:r>
-              <a:rPr lang="en-US" sz="4400" i="0" u="none" strike="noStrike" cap="none" dirty="0">
-                <a:solidFill>
-                  <a:schemeClr val="tx1"/>
-                </a:solidFill>
-                <a:latin typeface="Calibri" panose="020F0502020204030204" pitchFamily="34" charset="0"/>
-                <a:cs typeface="Calibri" panose="020F0502020204030204" pitchFamily="34" charset="0"/>
-                <a:sym typeface="Arial"/>
-              </a:rPr>
-              <a:t>Network Embedded Applications - Introduction</a:t>
-            </a:r>
-          </a:p>
-        </p:txBody>
-      </p:sp>
-    </p:spTree>
-  </p:cSld>
-  <p:clrMapOvr>
-    <a:masterClrMapping/>
-  </p:clrMapOvr>
-</p:sld>
-</file>
-
-<file path=ppt/slides/slide10.xml><?xml version="1.0" encoding="utf-8"?>
-<p:sld xmlns:a="http://schemas.openxmlformats.org/drawingml/2006/main" xmlns:r="http://schemas.openxmlformats.org/officeDocument/2006/relationships" xmlns:p="http://schemas.openxmlformats.org/presentationml/2006/main">
-  <p:cSld>
-    <p:spTree>
-      <p:nvGrpSpPr>
-        <p:cNvPr id="1" name=""/>
-        <p:cNvGrpSpPr/>
-        <p:nvPr/>
-      </p:nvGrpSpPr>
-      <p:grpSpPr>
-        <a:xfrm>
-          <a:off x="0" y="0"/>
-          <a:ext cx="0" cy="0"/>
-          <a:chOff x="0" y="0"/>
-          <a:chExt cx="0" cy="0"/>
-        </a:xfrm>
-      </p:grpSpPr>
-      <p:sp>
-        <p:nvSpPr>
-          <p:cNvPr id="3" name="Title 2"/>
-          <p:cNvSpPr>
-            <a:spLocks noGrp="1"/>
-          </p:cNvSpPr>
-          <p:nvPr>
-            <p:ph type="title"/>
-          </p:nvPr>
-        </p:nvSpPr>
-        <p:spPr>
-          <a:xfrm>
-            <a:off x="159603" y="374024"/>
-            <a:ext cx="7569812" cy="868622"/>
-          </a:xfrm>
-        </p:spPr>
-        <p:txBody>
-          <a:bodyPr/>
-          <a:lstStyle/>
-          <a:p>
-            <a:r>
-              <a:rPr lang="en-IN" sz="4000" dirty="0">
-                <a:latin typeface="Calibri" panose="020F0502020204030204" pitchFamily="34" charset="0"/>
-                <a:cs typeface="Calibri" panose="020F0502020204030204" pitchFamily="34" charset="0"/>
-              </a:rPr>
-              <a:t>Course Involves</a:t>
-            </a:r>
-          </a:p>
-        </p:txBody>
-      </p:sp>
-      <p:sp>
-        <p:nvSpPr>
-          <p:cNvPr id="2" name="Content Placeholder 1"/>
-          <p:cNvSpPr>
-            <a:spLocks noGrp="1"/>
-          </p:cNvSpPr>
-          <p:nvPr>
-            <p:ph idx="1"/>
-          </p:nvPr>
-        </p:nvSpPr>
-        <p:spPr>
-          <a:xfrm>
-            <a:off x="159603" y="1383125"/>
-            <a:ext cx="8833823" cy="5010209"/>
-          </a:xfrm>
-        </p:spPr>
-        <p:txBody>
-          <a:bodyPr>
-            <a:normAutofit/>
-          </a:bodyPr>
-          <a:lstStyle/>
-          <a:p>
-            <a:pPr marL="228600" lvl="0" indent="-228600" defTabSz="685800">
-              <a:lnSpc>
-                <a:spcPct val="110000"/>
-              </a:lnSpc>
-              <a:spcBef>
-                <a:spcPts val="700"/>
-              </a:spcBef>
-              <a:buClr>
-                <a:srgbClr val="0B082E"/>
-              </a:buClr>
-              <a:buFont typeface="Arial" panose="020B0604020202020204" pitchFamily="34" charset="0"/>
-              <a:buChar char="•"/>
-            </a:pPr>
-            <a:r>
-              <a:rPr lang="en-US" sz="2800" kern="1200" dirty="0">
-                <a:solidFill>
-                  <a:prstClr val="black">
-                    <a:lumMod val="65000"/>
-                    <a:lumOff val="35000"/>
-                  </a:prstClr>
-                </a:solidFill>
-                <a:latin typeface="Monotype Corsiva" pitchFamily="66" charset="0"/>
-                <a:ea typeface="+mn-ea"/>
-                <a:cs typeface="+mn-cs"/>
-              </a:rPr>
-              <a:t>Reading Assignments at end of class</a:t>
-            </a:r>
-          </a:p>
-          <a:p>
-            <a:pPr marL="228600" lvl="0" indent="-228600" defTabSz="685800">
-              <a:lnSpc>
-                <a:spcPct val="110000"/>
-              </a:lnSpc>
-              <a:spcBef>
-                <a:spcPts val="700"/>
-              </a:spcBef>
-              <a:buClr>
-                <a:srgbClr val="0B082E"/>
-              </a:buClr>
-              <a:buFont typeface="Arial" panose="020B0604020202020204" pitchFamily="34" charset="0"/>
-              <a:buChar char="•"/>
-            </a:pPr>
-            <a:r>
-              <a:rPr lang="en-US" sz="2800" kern="1200" dirty="0">
-                <a:solidFill>
-                  <a:prstClr val="black">
-                    <a:lumMod val="65000"/>
-                    <a:lumOff val="35000"/>
-                  </a:prstClr>
-                </a:solidFill>
-                <a:latin typeface="Monotype Corsiva" pitchFamily="66" charset="0"/>
-                <a:ea typeface="+mn-ea"/>
-                <a:cs typeface="+mn-cs"/>
-              </a:rPr>
-              <a:t>Goal of covering the area is substantial depth  </a:t>
-            </a:r>
-          </a:p>
-          <a:p>
-            <a:pPr marL="228600" lvl="0" indent="-228600" defTabSz="685800">
-              <a:lnSpc>
-                <a:spcPct val="110000"/>
-              </a:lnSpc>
-              <a:spcBef>
-                <a:spcPts val="700"/>
-              </a:spcBef>
-              <a:buClr>
-                <a:srgbClr val="0B082E"/>
-              </a:buClr>
-              <a:buFont typeface="Arial" panose="020B0604020202020204" pitchFamily="34" charset="0"/>
-              <a:buChar char="•"/>
-            </a:pPr>
-            <a:r>
-              <a:rPr lang="en-US" sz="2800" kern="1200" dirty="0">
-                <a:solidFill>
-                  <a:prstClr val="black">
-                    <a:lumMod val="65000"/>
-                    <a:lumOff val="35000"/>
-                  </a:prstClr>
-                </a:solidFill>
-                <a:latin typeface="Monotype Corsiva" pitchFamily="66" charset="0"/>
-                <a:ea typeface="+mn-ea"/>
-                <a:cs typeface="+mn-cs"/>
-              </a:rPr>
-              <a:t> It will require substantial reading and class participation</a:t>
-            </a:r>
-          </a:p>
-          <a:p>
-            <a:pPr marL="228600" lvl="0" indent="-228600" defTabSz="685800">
-              <a:lnSpc>
-                <a:spcPct val="110000"/>
-              </a:lnSpc>
-              <a:spcBef>
-                <a:spcPts val="700"/>
-              </a:spcBef>
-              <a:buClr>
-                <a:srgbClr val="0B082E"/>
-              </a:buClr>
-              <a:buFont typeface="Arial" panose="020B0604020202020204" pitchFamily="34" charset="0"/>
-              <a:buChar char="•"/>
-            </a:pPr>
-            <a:r>
-              <a:rPr lang="en-US" sz="2800" kern="1200" dirty="0">
-                <a:solidFill>
-                  <a:prstClr val="black">
-                    <a:lumMod val="65000"/>
-                    <a:lumOff val="35000"/>
-                  </a:prstClr>
-                </a:solidFill>
-                <a:latin typeface="Monotype Corsiva" pitchFamily="66" charset="0"/>
-                <a:ea typeface="+mn-ea"/>
-                <a:cs typeface="+mn-cs"/>
-              </a:rPr>
-              <a:t>Sequence of  individual  Network System Design</a:t>
-            </a:r>
-          </a:p>
-          <a:p>
-            <a:pPr marL="228600" lvl="0" indent="-228600" defTabSz="685800">
-              <a:lnSpc>
-                <a:spcPct val="110000"/>
-              </a:lnSpc>
-              <a:spcBef>
-                <a:spcPts val="700"/>
-              </a:spcBef>
-              <a:buClr>
-                <a:srgbClr val="0B082E"/>
-              </a:buClr>
-              <a:buFont typeface="Arial" panose="020B0604020202020204" pitchFamily="34" charset="0"/>
-              <a:buChar char="•"/>
-            </a:pPr>
-            <a:r>
-              <a:rPr lang="en-US" sz="2800" kern="1200" dirty="0">
-                <a:solidFill>
-                  <a:prstClr val="black">
-                    <a:lumMod val="65000"/>
-                    <a:lumOff val="35000"/>
-                  </a:prstClr>
-                </a:solidFill>
-                <a:latin typeface="Monotype Corsiva" pitchFamily="66" charset="0"/>
-                <a:ea typeface="+mn-ea"/>
-                <a:cs typeface="+mn-cs"/>
-              </a:rPr>
-              <a:t>Project</a:t>
-            </a:r>
-          </a:p>
-          <a:p>
-            <a:pPr marL="228600" lvl="0" indent="-228600" defTabSz="685800">
-              <a:lnSpc>
-                <a:spcPct val="110000"/>
-              </a:lnSpc>
-              <a:spcBef>
-                <a:spcPts val="700"/>
-              </a:spcBef>
-              <a:buClr>
-                <a:srgbClr val="0B082E"/>
-              </a:buClr>
-              <a:buFont typeface="Arial" panose="020B0604020202020204" pitchFamily="34" charset="0"/>
-              <a:buChar char="•"/>
-            </a:pPr>
-            <a:endParaRPr lang="en-IN" dirty="0"/>
-          </a:p>
-        </p:txBody>
-      </p:sp>
-    </p:spTree>
-    <p:extLst>
-      <p:ext uri="{BB962C8B-B14F-4D97-AF65-F5344CB8AC3E}">
-        <p14:creationId xmlns:p14="http://schemas.microsoft.com/office/powerpoint/2010/main" val="4128845506"/>
-      </p:ext>
-    </p:extLst>
-  </p:cSld>
-  <p:clrMapOvr>
-    <a:masterClrMapping/>
-  </p:clrMapOvr>
-  <p:timing>
-    <p:tnLst>
-      <p:par>
-        <p:cTn id="1" dur="indefinite" restart="never" nodeType="tmRoot">
-          <p:childTnLst>
-            <p:seq concurrent="1" nextAc="seek">
-              <p:cTn id="2" dur="indefinite" nodeType="mainSeq">
-                <p:childTnLst>
-                  <p:par>
-                    <p:cTn id="3" fill="hold">
-                      <p:stCondLst>
-                        <p:cond delay="indefinite"/>
-                      </p:stCondLst>
-                      <p:childTnLst>
-                        <p:par>
-                          <p:cTn id="4" fill="hold">
-                            <p:stCondLst>
-                              <p:cond delay="0"/>
-                            </p:stCondLst>
-                            <p:childTnLst>
-                              <p:par>
-                                <p:cTn id="5" presetID="18" presetClass="emph" presetSubtype="0" fill="hold" nodeType="clickEffect">
-                                  <p:stCondLst>
-                                    <p:cond delay="0"/>
-                                  </p:stCondLst>
-                                  <p:iterate type="lt">
-                                    <p:tmPct val="4000"/>
-                                  </p:iterate>
-                                  <p:childTnLst>
-                                    <p:set>
-                                      <p:cBhvr override="childStyle">
-                                        <p:cTn id="6" dur="500" fill="hold"/>
-                                        <p:tgtEl>
-                                          <p:spTgt spid="2">
-                                            <p:txEl>
-                                              <p:pRg st="0" end="0"/>
-                                            </p:txEl>
-                                          </p:spTgt>
-                                        </p:tgtEl>
-                                        <p:attrNameLst>
-                                          <p:attrName>style.textDecorationUnderline</p:attrName>
-                                        </p:attrNameLst>
-                                      </p:cBhvr>
-                                      <p:to>
-                                        <p:strVal val="true"/>
-                                      </p:to>
-                                    </p:set>
-                                  </p:childTnLst>
-                                </p:cTn>
-                              </p:par>
-                            </p:childTnLst>
-                          </p:cTn>
-                        </p:par>
-                      </p:childTnLst>
-                    </p:cTn>
-                  </p:par>
-                  <p:par>
-                    <p:cTn id="7" fill="hold">
-                      <p:stCondLst>
-                        <p:cond delay="indefinite"/>
-                      </p:stCondLst>
-                      <p:childTnLst>
-                        <p:par>
-                          <p:cTn id="8" fill="hold">
-                            <p:stCondLst>
-                              <p:cond delay="0"/>
-                            </p:stCondLst>
-                            <p:childTnLst>
-                              <p:par>
-                                <p:cTn id="9" presetID="18" presetClass="emph" presetSubtype="0" fill="hold" nodeType="clickEffect">
-                                  <p:stCondLst>
-                                    <p:cond delay="0"/>
-                                  </p:stCondLst>
-                                  <p:iterate type="lt">
-                                    <p:tmPct val="4000"/>
-                                  </p:iterate>
-                                  <p:childTnLst>
-                                    <p:set>
-                                      <p:cBhvr override="childStyle">
-                                        <p:cTn id="10" dur="500" fill="hold"/>
-                                        <p:tgtEl>
-                                          <p:spTgt spid="2">
-                                            <p:txEl>
-                                              <p:pRg st="1" end="1"/>
-                                            </p:txEl>
-                                          </p:spTgt>
-                                        </p:tgtEl>
-                                        <p:attrNameLst>
-                                          <p:attrName>style.textDecorationUnderline</p:attrName>
-                                        </p:attrNameLst>
-                                      </p:cBhvr>
-                                      <p:to>
-                                        <p:strVal val="true"/>
-                                      </p:to>
-                                    </p:set>
-                                  </p:childTnLst>
-                                </p:cTn>
-                              </p:par>
-                            </p:childTnLst>
-                          </p:cTn>
-                        </p:par>
-                      </p:childTnLst>
-                    </p:cTn>
-                  </p:par>
-                  <p:par>
-                    <p:cTn id="11" fill="hold">
-                      <p:stCondLst>
-                        <p:cond delay="indefinite"/>
-                      </p:stCondLst>
-                      <p:childTnLst>
-                        <p:par>
-                          <p:cTn id="12" fill="hold">
-                            <p:stCondLst>
-                              <p:cond delay="0"/>
-                            </p:stCondLst>
-                            <p:childTnLst>
-                              <p:par>
-                                <p:cTn id="13" presetID="18" presetClass="emph" presetSubtype="0" fill="hold" nodeType="clickEffect">
-                                  <p:stCondLst>
-                                    <p:cond delay="0"/>
-                                  </p:stCondLst>
-                                  <p:iterate type="lt">
-                                    <p:tmPct val="4000"/>
-                                  </p:iterate>
-                                  <p:childTnLst>
-                                    <p:set>
-                                      <p:cBhvr override="childStyle">
-                                        <p:cTn id="14" dur="500" fill="hold"/>
-                                        <p:tgtEl>
-                                          <p:spTgt spid="2">
-                                            <p:txEl>
-                                              <p:pRg st="2" end="2"/>
-                                            </p:txEl>
-                                          </p:spTgt>
-                                        </p:tgtEl>
-                                        <p:attrNameLst>
-                                          <p:attrName>style.textDecorationUnderline</p:attrName>
-                                        </p:attrNameLst>
-                                      </p:cBhvr>
-                                      <p:to>
-                                        <p:strVal val="true"/>
-                                      </p:to>
-                                    </p:set>
-                                  </p:childTnLst>
-                                </p:cTn>
-                              </p:par>
-                            </p:childTnLst>
-                          </p:cTn>
-                        </p:par>
-                      </p:childTnLst>
-                    </p:cTn>
-                  </p:par>
-                  <p:par>
-                    <p:cTn id="15" fill="hold">
-                      <p:stCondLst>
-                        <p:cond delay="indefinite"/>
-                      </p:stCondLst>
-                      <p:childTnLst>
-                        <p:par>
-                          <p:cTn id="16" fill="hold">
-                            <p:stCondLst>
-                              <p:cond delay="0"/>
-                            </p:stCondLst>
-                            <p:childTnLst>
-                              <p:par>
-                                <p:cTn id="17" presetID="18" presetClass="emph" presetSubtype="0" fill="hold" nodeType="clickEffect">
-                                  <p:stCondLst>
-                                    <p:cond delay="0"/>
-                                  </p:stCondLst>
-                                  <p:iterate type="lt">
-                                    <p:tmPct val="4000"/>
-                                  </p:iterate>
-                                  <p:childTnLst>
-                                    <p:set>
-                                      <p:cBhvr override="childStyle">
-                                        <p:cTn id="18" dur="500" fill="hold"/>
-                                        <p:tgtEl>
-                                          <p:spTgt spid="2">
-                                            <p:txEl>
-                                              <p:pRg st="3" end="3"/>
-                                            </p:txEl>
-                                          </p:spTgt>
-                                        </p:tgtEl>
-                                        <p:attrNameLst>
-                                          <p:attrName>style.textDecorationUnderline</p:attrName>
-                                        </p:attrNameLst>
-                                      </p:cBhvr>
-                                      <p:to>
-                                        <p:strVal val="true"/>
-                                      </p:to>
-                                    </p:set>
-                                  </p:childTnLst>
-                                </p:cTn>
-                              </p:par>
-                            </p:childTnLst>
-                          </p:cTn>
-                        </p:par>
-                      </p:childTnLst>
-                    </p:cTn>
-                  </p:par>
-                  <p:par>
-                    <p:cTn id="19" fill="hold">
-                      <p:stCondLst>
-                        <p:cond delay="indefinite"/>
-                      </p:stCondLst>
-                      <p:childTnLst>
-                        <p:par>
-                          <p:cTn id="20" fill="hold">
-                            <p:stCondLst>
-                              <p:cond delay="0"/>
-                            </p:stCondLst>
-                            <p:childTnLst>
-                              <p:par>
-                                <p:cTn id="21" presetID="18" presetClass="emph" presetSubtype="0" fill="hold" nodeType="clickEffect">
-                                  <p:stCondLst>
-                                    <p:cond delay="0"/>
-                                  </p:stCondLst>
-                                  <p:iterate type="lt">
-                                    <p:tmPct val="4000"/>
-                                  </p:iterate>
-                                  <p:childTnLst>
-                                    <p:set>
-                                      <p:cBhvr override="childStyle">
-                                        <p:cTn id="22" dur="500" fill="hold"/>
-                                        <p:tgtEl>
-                                          <p:spTgt spid="2">
-                                            <p:txEl>
-                                              <p:pRg st="4" end="4"/>
-                                            </p:txEl>
-                                          </p:spTgt>
-                                        </p:tgtEl>
-                                        <p:attrNameLst>
-                                          <p:attrName>style.textDecorationUnderline</p:attrName>
-                                        </p:attrNameLst>
-                                      </p:cBhvr>
-                                      <p:to>
-                                        <p:strVal val="true"/>
-                                      </p:to>
-                                    </p:set>
-                                  </p:childTnLst>
-                                </p:cTn>
-                              </p:par>
-                            </p:childTnLst>
-                          </p:cTn>
-                        </p:par>
-                      </p:childTnLst>
-                    </p:cTn>
-                  </p:par>
-                </p:childTnLst>
-              </p:cTn>
-              <p:prevCondLst>
-                <p:cond evt="onPrev" delay="0">
-                  <p:tgtEl>
-                    <p:sldTgt/>
-                  </p:tgtEl>
-                </p:cond>
-              </p:prevCondLst>
-              <p:nextCondLst>
-                <p:cond evt="onNext" delay="0">
-                  <p:tgtEl>
-                    <p:sldTgt/>
-                  </p:tgtEl>
-                </p:cond>
-              </p:nextCondLst>
-            </p:seq>
-          </p:childTnLst>
-        </p:cTn>
-      </p:par>
-    </p:tnLst>
-  </p:timing>
-</p:sld>
-</file>
-
-<file path=ppt/slides/slide2.xml><?xml version="1.0" encoding="utf-8"?>
-<p:sld xmlns:a="http://schemas.openxmlformats.org/drawingml/2006/main" xmlns:r="http://schemas.openxmlformats.org/officeDocument/2006/relationships" xmlns:p="http://schemas.openxmlformats.org/presentationml/2006/main">
-  <p:cSld>
-    <p:spTree>
-      <p:nvGrpSpPr>
-        <p:cNvPr id="1" name=""/>
-        <p:cNvGrpSpPr/>
-        <p:nvPr/>
-      </p:nvGrpSpPr>
-      <p:grpSpPr>
-        <a:xfrm>
-          <a:off x="0" y="0"/>
-          <a:ext cx="0" cy="0"/>
-          <a:chOff x="0" y="0"/>
-          <a:chExt cx="0" cy="0"/>
-        </a:xfrm>
-      </p:grpSpPr>
-      <p:sp>
-        <p:nvSpPr>
-          <p:cNvPr id="3" name="Title 2"/>
-          <p:cNvSpPr>
-            <a:spLocks noGrp="1"/>
-          </p:cNvSpPr>
-          <p:nvPr>
-            <p:ph type="title"/>
-          </p:nvPr>
-        </p:nvSpPr>
-        <p:spPr>
-          <a:xfrm>
-            <a:off x="159603" y="374024"/>
-            <a:ext cx="7569812" cy="868622"/>
-          </a:xfrm>
-        </p:spPr>
-        <p:txBody>
-          <a:bodyPr/>
-          <a:lstStyle/>
-          <a:p>
-            <a:r>
-              <a:rPr lang="en-IN" sz="4000" dirty="0">
-                <a:latin typeface="Calibri" panose="020F0502020204030204" pitchFamily="34" charset="0"/>
-                <a:cs typeface="Calibri" panose="020F0502020204030204" pitchFamily="34" charset="0"/>
-              </a:rPr>
-              <a:t>Networked Embedded Systems</a:t>
-            </a:r>
-          </a:p>
-        </p:txBody>
-      </p:sp>
-      <p:sp>
-        <p:nvSpPr>
-          <p:cNvPr id="2" name="Content Placeholder 1"/>
-          <p:cNvSpPr>
-            <a:spLocks noGrp="1"/>
-          </p:cNvSpPr>
-          <p:nvPr>
-            <p:ph idx="1"/>
-          </p:nvPr>
-        </p:nvSpPr>
-        <p:spPr>
-          <a:xfrm>
-            <a:off x="159603" y="1383125"/>
-            <a:ext cx="8833823" cy="5010209"/>
-          </a:xfrm>
-        </p:spPr>
-        <p:txBody>
-          <a:bodyPr>
-            <a:normAutofit/>
-          </a:bodyPr>
-          <a:lstStyle/>
-          <a:p>
-            <a:pPr marL="228600" lvl="0" indent="-228600" defTabSz="685800">
-              <a:lnSpc>
-                <a:spcPct val="110000"/>
-              </a:lnSpc>
-              <a:spcBef>
-                <a:spcPts val="700"/>
-              </a:spcBef>
-              <a:buClr>
-                <a:srgbClr val="0B082E"/>
-              </a:buClr>
-              <a:buFont typeface="Arial" panose="020B0604020202020204" pitchFamily="34" charset="0"/>
-              <a:buChar char="•"/>
-            </a:pPr>
-            <a:r>
-              <a:rPr lang="en-US" sz="2400" kern="1200" dirty="0">
-                <a:solidFill>
-                  <a:prstClr val="black">
-                    <a:lumMod val="65000"/>
-                    <a:lumOff val="35000"/>
-                  </a:prstClr>
-                </a:solidFill>
-                <a:latin typeface="Gill Sans MT" panose="020B0502020104020203"/>
-                <a:ea typeface="+mn-ea"/>
-                <a:cs typeface="+mn-cs"/>
-              </a:rPr>
-              <a:t>Collection of </a:t>
-            </a:r>
-            <a:r>
-              <a:rPr lang="en-US" sz="2400" kern="1200" dirty="0">
-                <a:solidFill>
-                  <a:srgbClr val="FF0000"/>
-                </a:solidFill>
-                <a:latin typeface="Gill Sans MT" panose="020B0502020104020203"/>
-                <a:ea typeface="+mn-ea"/>
-                <a:cs typeface="+mn-cs"/>
-              </a:rPr>
-              <a:t>spatially </a:t>
-            </a:r>
-            <a:r>
-              <a:rPr lang="en-US" sz="2400" kern="1200" dirty="0">
-                <a:solidFill>
-                  <a:prstClr val="black">
-                    <a:lumMod val="95000"/>
-                    <a:lumOff val="5000"/>
-                  </a:prstClr>
-                </a:solidFill>
-                <a:latin typeface="Gill Sans MT" panose="020B0502020104020203"/>
-                <a:ea typeface="+mn-ea"/>
-                <a:cs typeface="+mn-cs"/>
-              </a:rPr>
-              <a:t>&amp; </a:t>
-            </a:r>
-            <a:r>
-              <a:rPr lang="en-US" sz="2400" kern="1200" dirty="0">
-                <a:solidFill>
-                  <a:schemeClr val="bg2">
-                    <a:lumMod val="75000"/>
-                    <a:lumOff val="25000"/>
-                  </a:schemeClr>
-                </a:solidFill>
-                <a:latin typeface="Gill Sans MT" panose="020B0502020104020203"/>
-                <a:ea typeface="+mn-ea"/>
-                <a:cs typeface="+mn-cs"/>
-              </a:rPr>
-              <a:t>functionally</a:t>
-            </a:r>
-            <a:r>
-              <a:rPr lang="en-US" sz="2400" kern="1200" dirty="0">
-                <a:solidFill>
-                  <a:srgbClr val="C65E5E">
-                    <a:lumMod val="50000"/>
-                  </a:srgbClr>
-                </a:solidFill>
-                <a:latin typeface="Gill Sans MT" panose="020B0502020104020203"/>
-                <a:ea typeface="+mn-ea"/>
-                <a:cs typeface="+mn-cs"/>
-              </a:rPr>
-              <a:t> </a:t>
-            </a:r>
-            <a:r>
-              <a:rPr lang="en-US" sz="2400" kern="1200" dirty="0">
-                <a:solidFill>
-                  <a:prstClr val="black"/>
-                </a:solidFill>
-                <a:latin typeface="Gill Sans MT" panose="020B0502020104020203"/>
-                <a:ea typeface="+mn-ea"/>
-                <a:cs typeface="+mn-cs"/>
-              </a:rPr>
-              <a:t>embedded nodes connected via wireline/wireless communication infrastructure/protocols interacting with the environment</a:t>
-            </a:r>
-          </a:p>
-          <a:p>
-            <a:pPr marL="685800" lvl="1" indent="-228600" defTabSz="685800">
-              <a:lnSpc>
-                <a:spcPct val="110000"/>
-              </a:lnSpc>
-              <a:spcBef>
-                <a:spcPts val="700"/>
-              </a:spcBef>
-              <a:buClr>
-                <a:srgbClr val="0B082E"/>
-              </a:buClr>
-              <a:buFont typeface="Gill Sans MT" panose="020B0502020104020203" pitchFamily="34" charset="0"/>
-              <a:buChar char="–"/>
-            </a:pPr>
-            <a:r>
-              <a:rPr lang="en-US" sz="2400" kern="1200" dirty="0">
-                <a:solidFill>
-                  <a:prstClr val="black"/>
-                </a:solidFill>
-                <a:latin typeface="Gill Sans MT" panose="020B0502020104020203"/>
-                <a:ea typeface="+mn-ea"/>
-                <a:cs typeface="+mn-cs"/>
-              </a:rPr>
-              <a:t>Sensors, Actuators</a:t>
-            </a:r>
-          </a:p>
-          <a:p>
-            <a:pPr marL="228600" lvl="0" indent="-228600" defTabSz="685800">
-              <a:lnSpc>
-                <a:spcPct val="110000"/>
-              </a:lnSpc>
-              <a:spcBef>
-                <a:spcPts val="700"/>
-              </a:spcBef>
-              <a:buClr>
-                <a:srgbClr val="0B082E"/>
-              </a:buClr>
-              <a:buFont typeface="Arial" panose="020B0604020202020204" pitchFamily="34" charset="0"/>
-              <a:buChar char="•"/>
-            </a:pPr>
-            <a:r>
-              <a:rPr lang="en-US" sz="2400" kern="1200" dirty="0">
-                <a:solidFill>
-                  <a:prstClr val="black"/>
-                </a:solidFill>
-                <a:latin typeface="Gill Sans MT" panose="020B0502020104020203"/>
-                <a:ea typeface="+mn-ea"/>
-                <a:cs typeface="+mn-cs"/>
-              </a:rPr>
-              <a:t>Interact with each other </a:t>
-            </a:r>
-          </a:p>
-          <a:p>
-            <a:pPr marL="228600" lvl="0" indent="-228600" defTabSz="685800">
-              <a:lnSpc>
-                <a:spcPct val="110000"/>
-              </a:lnSpc>
-              <a:spcBef>
-                <a:spcPts val="700"/>
-              </a:spcBef>
-              <a:buClr>
-                <a:srgbClr val="0B082E"/>
-              </a:buClr>
-              <a:buFont typeface="Arial" panose="020B0604020202020204" pitchFamily="34" charset="0"/>
-              <a:buChar char="•"/>
-            </a:pPr>
-            <a:r>
-              <a:rPr lang="en-US" sz="2400" kern="1200" dirty="0">
-                <a:solidFill>
-                  <a:prstClr val="black"/>
-                </a:solidFill>
-                <a:latin typeface="Gill Sans MT" panose="020B0502020104020203"/>
-                <a:ea typeface="+mn-ea"/>
-                <a:cs typeface="+mn-cs"/>
-              </a:rPr>
-              <a:t>Master node  - overall coordination – working towards a single goal</a:t>
-            </a:r>
-            <a:endParaRPr lang="en-US" sz="2400" kern="1200" dirty="0">
-              <a:solidFill>
-                <a:prstClr val="black">
-                  <a:lumMod val="65000"/>
-                  <a:lumOff val="35000"/>
-                </a:prstClr>
-              </a:solidFill>
-              <a:latin typeface="Gill Sans MT" panose="020B0502020104020203"/>
-              <a:ea typeface="+mn-ea"/>
-              <a:cs typeface="+mn-cs"/>
-            </a:endParaRPr>
-          </a:p>
-          <a:p>
-            <a:pPr marL="342900" indent="-342900">
-              <a:buFont typeface="Arial" panose="020B0604020202020204" pitchFamily="34" charset="0"/>
-              <a:buChar char="•"/>
-            </a:pPr>
-            <a:endParaRPr lang="en-IN" dirty="0"/>
-          </a:p>
-        </p:txBody>
-      </p:sp>
-    </p:spTree>
-    <p:extLst>
-      <p:ext uri="{BB962C8B-B14F-4D97-AF65-F5344CB8AC3E}">
-        <p14:creationId xmlns:p14="http://schemas.microsoft.com/office/powerpoint/2010/main" val="4119321418"/>
-      </p:ext>
-    </p:extLst>
-  </p:cSld>
-  <p:clrMapOvr>
-    <a:masterClrMapping/>
-  </p:clrMapOvr>
-  <p:timing>
-    <p:tnLst>
-      <p:par>
-        <p:cTn id="1" dur="indefinite" restart="never" nodeType="tmRoot">
-          <p:childTnLst>
-            <p:seq concurrent="1" nextAc="seek">
-              <p:cTn id="2" dur="indefinite" nodeType="mainSeq">
-                <p:childTnLst>
-                  <p:par>
-                    <p:cTn id="3" fill="hold">
-                      <p:stCondLst>
-                        <p:cond delay="indefinite"/>
-                      </p:stCondLst>
-                      <p:childTnLst>
-                        <p:par>
-                          <p:cTn id="4" fill="hold">
-                            <p:stCondLst>
-                              <p:cond delay="0"/>
-                            </p:stCondLst>
-                            <p:childTnLst>
-                              <p:par>
-                                <p:cTn id="5" presetID="2" presetClass="entr" presetSubtype="8" fill="hold" nodeType="clickEffect">
-                                  <p:stCondLst>
-                                    <p:cond delay="0"/>
-                                  </p:stCondLst>
-                                  <p:childTnLst>
-                                    <p:set>
-                                      <p:cBhvr>
-                                        <p:cTn id="6" dur="1" fill="hold">
-                                          <p:stCondLst>
-                                            <p:cond delay="0"/>
-                                          </p:stCondLst>
-                                        </p:cTn>
-                                        <p:tgtEl>
-                                          <p:spTgt spid="2">
-                                            <p:txEl>
-                                              <p:pRg st="0" end="0"/>
-                                            </p:txEl>
-                                          </p:spTgt>
-                                        </p:tgtEl>
-                                        <p:attrNameLst>
-                                          <p:attrName>style.visibility</p:attrName>
-                                        </p:attrNameLst>
-                                      </p:cBhvr>
-                                      <p:to>
-                                        <p:strVal val="visible"/>
-                                      </p:to>
-                                    </p:set>
-                                    <p:anim calcmode="lin" valueType="num">
-                                      <p:cBhvr additive="base">
-                                        <p:cTn id="7" dur="500" fill="hold"/>
-                                        <p:tgtEl>
-                                          <p:spTgt spid="2">
-                                            <p:txEl>
-                                              <p:pRg st="0" end="0"/>
-                                            </p:txEl>
-                                          </p:spTgt>
-                                        </p:tgtEl>
-                                        <p:attrNameLst>
-                                          <p:attrName>ppt_x</p:attrName>
-                                        </p:attrNameLst>
-                                      </p:cBhvr>
-                                      <p:tavLst>
-                                        <p:tav tm="0">
-                                          <p:val>
-                                            <p:strVal val="0-#ppt_w/2"/>
-                                          </p:val>
-                                        </p:tav>
-                                        <p:tav tm="100000">
-                                          <p:val>
-                                            <p:strVal val="#ppt_x"/>
-                                          </p:val>
-                                        </p:tav>
-                                      </p:tavLst>
-                                    </p:anim>
-                                    <p:anim calcmode="lin" valueType="num">
-                                      <p:cBhvr additive="base">
-                                        <p:cTn id="8" dur="500" fill="hold"/>
-                                        <p:tgtEl>
-                                          <p:spTgt spid="2">
-                                            <p:txEl>
-                                              <p:pRg st="0" end="0"/>
-                                            </p:txEl>
-                                          </p:spTgt>
-                                        </p:tgtEl>
-                                        <p:attrNameLst>
-                                          <p:attrName>ppt_y</p:attrName>
-                                        </p:attrNameLst>
-                                      </p:cBhvr>
-                                      <p:tavLst>
-                                        <p:tav tm="0">
-                                          <p:val>
-                                            <p:strVal val="#ppt_y"/>
-                                          </p:val>
-                                        </p:tav>
-                                        <p:tav tm="100000">
-                                          <p:val>
-                                            <p:strVal val="#ppt_y"/>
-                                          </p:val>
-                                        </p:tav>
-                                      </p:tavLst>
-                                    </p:anim>
-                                  </p:childTnLst>
-                                </p:cTn>
-                              </p:par>
-                            </p:childTnLst>
-                          </p:cTn>
-                        </p:par>
-                      </p:childTnLst>
-                    </p:cTn>
-                  </p:par>
-                  <p:par>
-                    <p:cTn id="9" fill="hold">
-                      <p:stCondLst>
-                        <p:cond delay="indefinite"/>
-                      </p:stCondLst>
-                      <p:childTnLst>
-                        <p:par>
-                          <p:cTn id="10" fill="hold">
-                            <p:stCondLst>
-                              <p:cond delay="0"/>
-                            </p:stCondLst>
-                            <p:childTnLst>
-                              <p:par>
-                                <p:cTn id="11" presetID="2" presetClass="entr" presetSubtype="8" fill="hold" nodeType="clickEffect">
-                                  <p:stCondLst>
-                                    <p:cond delay="0"/>
-                                  </p:stCondLst>
-                                  <p:childTnLst>
-                                    <p:set>
-                                      <p:cBhvr>
-                                        <p:cTn id="12" dur="1" fill="hold">
-                                          <p:stCondLst>
-                                            <p:cond delay="0"/>
-                                          </p:stCondLst>
-                                        </p:cTn>
-                                        <p:tgtEl>
-                                          <p:spTgt spid="2">
-                                            <p:txEl>
-                                              <p:pRg st="1" end="1"/>
-                                            </p:txEl>
-                                          </p:spTgt>
-                                        </p:tgtEl>
-                                        <p:attrNameLst>
-                                          <p:attrName>style.visibility</p:attrName>
-                                        </p:attrNameLst>
-                                      </p:cBhvr>
-                                      <p:to>
-                                        <p:strVal val="visible"/>
-                                      </p:to>
-                                    </p:set>
-                                    <p:anim calcmode="lin" valueType="num">
-                                      <p:cBhvr additive="base">
-                                        <p:cTn id="13" dur="500" fill="hold"/>
-                                        <p:tgtEl>
-                                          <p:spTgt spid="2">
-                                            <p:txEl>
-                                              <p:pRg st="1" end="1"/>
-                                            </p:txEl>
-                                          </p:spTgt>
-                                        </p:tgtEl>
-                                        <p:attrNameLst>
-                                          <p:attrName>ppt_x</p:attrName>
-                                        </p:attrNameLst>
-                                      </p:cBhvr>
-                                      <p:tavLst>
-                                        <p:tav tm="0">
-                                          <p:val>
-                                            <p:strVal val="0-#ppt_w/2"/>
-                                          </p:val>
-                                        </p:tav>
-                                        <p:tav tm="100000">
-                                          <p:val>
-                                            <p:strVal val="#ppt_x"/>
-                                          </p:val>
-                                        </p:tav>
-                                      </p:tavLst>
-                                    </p:anim>
-                                    <p:anim calcmode="lin" valueType="num">
-                                      <p:cBhvr additive="base">
-                                        <p:cTn id="14" dur="500" fill="hold"/>
-                                        <p:tgtEl>
-                                          <p:spTgt spid="2">
-                                            <p:txEl>
-                                              <p:pRg st="1" end="1"/>
-                                            </p:txEl>
-                                          </p:spTgt>
-                                        </p:tgtEl>
-                                        <p:attrNameLst>
-                                          <p:attrName>ppt_y</p:attrName>
-                                        </p:attrNameLst>
-                                      </p:cBhvr>
-                                      <p:tavLst>
-                                        <p:tav tm="0">
-                                          <p:val>
-                                            <p:strVal val="#ppt_y"/>
-                                          </p:val>
-                                        </p:tav>
-                                        <p:tav tm="100000">
-                                          <p:val>
-                                            <p:strVal val="#ppt_y"/>
-                                          </p:val>
-                                        </p:tav>
-                                      </p:tavLst>
-                                    </p:anim>
-                                  </p:childTnLst>
-                                </p:cTn>
-                              </p:par>
-                            </p:childTnLst>
-                          </p:cTn>
-                        </p:par>
-                      </p:childTnLst>
-                    </p:cTn>
-                  </p:par>
-                  <p:par>
-                    <p:cTn id="15" fill="hold">
-                      <p:stCondLst>
-                        <p:cond delay="indefinite"/>
-                      </p:stCondLst>
-                      <p:childTnLst>
-                        <p:par>
-                          <p:cTn id="16" fill="hold">
-                            <p:stCondLst>
-                              <p:cond delay="0"/>
-                            </p:stCondLst>
-                            <p:childTnLst>
-                              <p:par>
-                                <p:cTn id="17" presetID="2" presetClass="entr" presetSubtype="8" fill="hold" nodeType="clickEffect">
-                                  <p:stCondLst>
-                                    <p:cond delay="0"/>
-                                  </p:stCondLst>
-                                  <p:childTnLst>
-                                    <p:set>
-                                      <p:cBhvr>
-                                        <p:cTn id="18" dur="1" fill="hold">
-                                          <p:stCondLst>
-                                            <p:cond delay="0"/>
-                                          </p:stCondLst>
-                                        </p:cTn>
-                                        <p:tgtEl>
-                                          <p:spTgt spid="2">
-                                            <p:txEl>
-                                              <p:pRg st="2" end="2"/>
-                                            </p:txEl>
-                                          </p:spTgt>
-                                        </p:tgtEl>
-                                        <p:attrNameLst>
-                                          <p:attrName>style.visibility</p:attrName>
-                                        </p:attrNameLst>
-                                      </p:cBhvr>
-                                      <p:to>
-                                        <p:strVal val="visible"/>
-                                      </p:to>
-                                    </p:set>
-                                    <p:anim calcmode="lin" valueType="num">
-                                      <p:cBhvr additive="base">
-                                        <p:cTn id="19" dur="500" fill="hold"/>
-                                        <p:tgtEl>
-                                          <p:spTgt spid="2">
-                                            <p:txEl>
-                                              <p:pRg st="2" end="2"/>
-                                            </p:txEl>
-                                          </p:spTgt>
-                                        </p:tgtEl>
-                                        <p:attrNameLst>
-                                          <p:attrName>ppt_x</p:attrName>
-                                        </p:attrNameLst>
-                                      </p:cBhvr>
-                                      <p:tavLst>
-                                        <p:tav tm="0">
-                                          <p:val>
-                                            <p:strVal val="0-#ppt_w/2"/>
-                                          </p:val>
-                                        </p:tav>
-                                        <p:tav tm="100000">
-                                          <p:val>
-                                            <p:strVal val="#ppt_x"/>
-                                          </p:val>
-                                        </p:tav>
-                                      </p:tavLst>
-                                    </p:anim>
-                                    <p:anim calcmode="lin" valueType="num">
-                                      <p:cBhvr additive="base">
-                                        <p:cTn id="20" dur="500" fill="hold"/>
-                                        <p:tgtEl>
-                                          <p:spTgt spid="2">
-                                            <p:txEl>
-                                              <p:pRg st="2" end="2"/>
-                                            </p:txEl>
-                                          </p:spTgt>
-                                        </p:tgtEl>
-                                        <p:attrNameLst>
-                                          <p:attrName>ppt_y</p:attrName>
-                                        </p:attrNameLst>
-                                      </p:cBhvr>
-                                      <p:tavLst>
-                                        <p:tav tm="0">
-                                          <p:val>
-                                            <p:strVal val="#ppt_y"/>
-                                          </p:val>
-                                        </p:tav>
-                                        <p:tav tm="100000">
-                                          <p:val>
-                                            <p:strVal val="#ppt_y"/>
-                                          </p:val>
-                                        </p:tav>
-                                      </p:tavLst>
-                                    </p:anim>
-                                  </p:childTnLst>
-                                </p:cTn>
-                              </p:par>
-                            </p:childTnLst>
-                          </p:cTn>
-                        </p:par>
-                      </p:childTnLst>
-                    </p:cTn>
-                  </p:par>
-                  <p:par>
-                    <p:cTn id="21" fill="hold">
-                      <p:stCondLst>
-                        <p:cond delay="indefinite"/>
-                      </p:stCondLst>
-                      <p:childTnLst>
-                        <p:par>
-                          <p:cTn id="22" fill="hold">
-                            <p:stCondLst>
-                              <p:cond delay="0"/>
-                            </p:stCondLst>
-                            <p:childTnLst>
-                              <p:par>
-                                <p:cTn id="23" presetID="2" presetClass="entr" presetSubtype="8" fill="hold" nodeType="clickEffect">
-                                  <p:stCondLst>
-                                    <p:cond delay="0"/>
-                                  </p:stCondLst>
-                                  <p:childTnLst>
-                                    <p:set>
-                                      <p:cBhvr>
-                                        <p:cTn id="24" dur="1" fill="hold">
-                                          <p:stCondLst>
-                                            <p:cond delay="0"/>
-                                          </p:stCondLst>
-                                        </p:cTn>
-                                        <p:tgtEl>
-                                          <p:spTgt spid="2">
-                                            <p:txEl>
-                                              <p:pRg st="3" end="3"/>
-                                            </p:txEl>
-                                          </p:spTgt>
-                                        </p:tgtEl>
-                                        <p:attrNameLst>
-                                          <p:attrName>style.visibility</p:attrName>
-                                        </p:attrNameLst>
-                                      </p:cBhvr>
-                                      <p:to>
-                                        <p:strVal val="visible"/>
-                                      </p:to>
-                                    </p:set>
-                                    <p:anim calcmode="lin" valueType="num">
-                                      <p:cBhvr additive="base">
-                                        <p:cTn id="25" dur="500" fill="hold"/>
-                                        <p:tgtEl>
-                                          <p:spTgt spid="2">
-                                            <p:txEl>
-                                              <p:pRg st="3" end="3"/>
-                                            </p:txEl>
-                                          </p:spTgt>
-                                        </p:tgtEl>
-                                        <p:attrNameLst>
-                                          <p:attrName>ppt_x</p:attrName>
-                                        </p:attrNameLst>
-                                      </p:cBhvr>
-                                      <p:tavLst>
-                                        <p:tav tm="0">
-                                          <p:val>
-                                            <p:strVal val="0-#ppt_w/2"/>
-                                          </p:val>
-                                        </p:tav>
-                                        <p:tav tm="100000">
-                                          <p:val>
-                                            <p:strVal val="#ppt_x"/>
-                                          </p:val>
-                                        </p:tav>
-                                      </p:tavLst>
-                                    </p:anim>
-                                    <p:anim calcmode="lin" valueType="num">
-                                      <p:cBhvr additive="base">
-                                        <p:cTn id="26" dur="500" fill="hold"/>
-                                        <p:tgtEl>
-                                          <p:spTgt spid="2">
-                                            <p:txEl>
-                                              <p:pRg st="3" end="3"/>
-                                            </p:txEl>
-                                          </p:spTgt>
-                                        </p:tgtEl>
-                                        <p:attrNameLst>
-                                          <p:attrName>ppt_y</p:attrName>
-                                        </p:attrNameLst>
-                                      </p:cBhvr>
-                                      <p:tavLst>
-                                        <p:tav tm="0">
-                                          <p:val>
-                                            <p:strVal val="#ppt_y"/>
-                                          </p:val>
-                                        </p:tav>
-                                        <p:tav tm="100000">
-                                          <p:val>
-                                            <p:strVal val="#ppt_y"/>
-                                          </p:val>
-                                        </p:tav>
-                                      </p:tavLst>
-                                    </p:anim>
-                                  </p:childTnLst>
-                                </p:cTn>
-                              </p:par>
-                            </p:childTnLst>
-                          </p:cTn>
-                        </p:par>
-                      </p:childTnLst>
-                    </p:cTn>
-                  </p:par>
-                </p:childTnLst>
-              </p:cTn>
-              <p:prevCondLst>
-                <p:cond evt="onPrev" delay="0">
-                  <p:tgtEl>
-                    <p:sldTgt/>
-                  </p:tgtEl>
-                </p:cond>
-              </p:prevCondLst>
-              <p:nextCondLst>
-                <p:cond evt="onNext" delay="0">
-                  <p:tgtEl>
-                    <p:sldTgt/>
-                  </p:tgtEl>
-                </p:cond>
-              </p:nextCondLst>
-            </p:seq>
-          </p:childTnLst>
-        </p:cTn>
-      </p:par>
-    </p:tnLst>
-  </p:timing>
-</p:sld>
-</file>
-
-<file path=ppt/slides/slide3.xml><?xml version="1.0" encoding="utf-8"?>
 <p:sld xmlns:a="http://schemas.openxmlformats.org/drawingml/2006/main" xmlns:r="http://schemas.openxmlformats.org/officeDocument/2006/relationships" xmlns:p="http://schemas.openxmlformats.org/presentationml/2006/main">
   <p:cSld>
     <p:spTree>
@@ -5663,7 +3363,7 @@
 </p:sld>
 </file>
 
-<file path=ppt/slides/slide4.xml><?xml version="1.0" encoding="utf-8"?>
+<file path=ppt/slides/slide2.xml><?xml version="1.0" encoding="utf-8"?>
 <p:sld xmlns:a="http://schemas.openxmlformats.org/drawingml/2006/main" xmlns:r="http://schemas.openxmlformats.org/officeDocument/2006/relationships" xmlns:p="http://schemas.openxmlformats.org/presentationml/2006/main">
   <p:cSld>
     <p:spTree>
@@ -6331,7 +4031,7 @@
 </p:sld>
 </file>
 
-<file path=ppt/slides/slide5.xml><?xml version="1.0" encoding="utf-8"?>
+<file path=ppt/slides/slide3.xml><?xml version="1.0" encoding="utf-8"?>
 <p:sld xmlns:a="http://schemas.openxmlformats.org/drawingml/2006/main" xmlns:r="http://schemas.openxmlformats.org/officeDocument/2006/relationships" xmlns:p="http://schemas.openxmlformats.org/presentationml/2006/main">
   <p:cSld>
     <p:spTree>
@@ -6748,2418 +4448,6 @@
                                           <p:spTgt spid="2">
                                             <p:txEl>
                                               <p:pRg st="3" end="3"/>
-                                            </p:txEl>
-                                          </p:spTgt>
-                                        </p:tgtEl>
-                                        <p:attrNameLst>
-                                          <p:attrName>style.textDecorationUnderline</p:attrName>
-                                        </p:attrNameLst>
-                                      </p:cBhvr>
-                                      <p:to>
-                                        <p:strVal val="true"/>
-                                      </p:to>
-                                    </p:set>
-                                  </p:childTnLst>
-                                </p:cTn>
-                              </p:par>
-                            </p:childTnLst>
-                          </p:cTn>
-                        </p:par>
-                      </p:childTnLst>
-                    </p:cTn>
-                  </p:par>
-                </p:childTnLst>
-              </p:cTn>
-              <p:prevCondLst>
-                <p:cond evt="onPrev" delay="0">
-                  <p:tgtEl>
-                    <p:sldTgt/>
-                  </p:tgtEl>
-                </p:cond>
-              </p:prevCondLst>
-              <p:nextCondLst>
-                <p:cond evt="onNext" delay="0">
-                  <p:tgtEl>
-                    <p:sldTgt/>
-                  </p:tgtEl>
-                </p:cond>
-              </p:nextCondLst>
-            </p:seq>
-          </p:childTnLst>
-        </p:cTn>
-      </p:par>
-    </p:tnLst>
-  </p:timing>
-</p:sld>
-</file>
-
-<file path=ppt/slides/slide6.xml><?xml version="1.0" encoding="utf-8"?>
-<p:sld xmlns:a="http://schemas.openxmlformats.org/drawingml/2006/main" xmlns:r="http://schemas.openxmlformats.org/officeDocument/2006/relationships" xmlns:p="http://schemas.openxmlformats.org/presentationml/2006/main">
-  <p:cSld>
-    <p:spTree>
-      <p:nvGrpSpPr>
-        <p:cNvPr id="1" name=""/>
-        <p:cNvGrpSpPr/>
-        <p:nvPr/>
-      </p:nvGrpSpPr>
-      <p:grpSpPr>
-        <a:xfrm>
-          <a:off x="0" y="0"/>
-          <a:ext cx="0" cy="0"/>
-          <a:chOff x="0" y="0"/>
-          <a:chExt cx="0" cy="0"/>
-        </a:xfrm>
-      </p:grpSpPr>
-      <p:sp>
-        <p:nvSpPr>
-          <p:cNvPr id="3" name="Title 2">
-            <a:extLst>
-              <a:ext uri="{FF2B5EF4-FFF2-40B4-BE49-F238E27FC236}">
-                <a16:creationId xmlns:a16="http://schemas.microsoft.com/office/drawing/2014/main" id="{E3EA8F3D-5E80-47FC-B604-B77B30D5F33E}"/>
-              </a:ext>
-            </a:extLst>
-          </p:cNvPr>
-          <p:cNvSpPr>
-            <a:spLocks noGrp="1"/>
-          </p:cNvSpPr>
-          <p:nvPr>
-            <p:ph type="title"/>
-          </p:nvPr>
-        </p:nvSpPr>
-        <p:spPr>
-          <a:xfrm>
-            <a:off x="500446" y="400840"/>
-            <a:ext cx="6526336" cy="826598"/>
-          </a:xfrm>
-        </p:spPr>
-        <p:txBody>
-          <a:bodyPr/>
-          <a:lstStyle/>
-          <a:p>
-            <a:r>
-              <a:rPr lang="en-US" sz="4800" dirty="0">
-                <a:latin typeface="Calibri" panose="020F0502020204030204" pitchFamily="34" charset="0"/>
-                <a:cs typeface="Calibri" panose="020F0502020204030204" pitchFamily="34" charset="0"/>
-              </a:rPr>
-              <a:t>NES</a:t>
-            </a:r>
-          </a:p>
-        </p:txBody>
-      </p:sp>
-      <p:pic>
-        <p:nvPicPr>
-          <p:cNvPr id="4" name="Picture 3" descr="A close up of a sign&#10;&#10;Description generated with high confidence">
-            <a:extLst>
-              <a:ext uri="{FF2B5EF4-FFF2-40B4-BE49-F238E27FC236}">
-                <a16:creationId xmlns:a16="http://schemas.microsoft.com/office/drawing/2014/main" id="{CD43DD65-D872-4793-A99C-92D52F284DC5}"/>
-              </a:ext>
-            </a:extLst>
-          </p:cNvPr>
-          <p:cNvPicPr>
-            <a:picLocks noChangeAspect="1"/>
-          </p:cNvPicPr>
-          <p:nvPr/>
-        </p:nvPicPr>
-        <p:blipFill>
-          <a:blip r:embed="rId2"/>
-          <a:stretch>
-            <a:fillRect/>
-          </a:stretch>
-        </p:blipFill>
-        <p:spPr>
-          <a:xfrm>
-            <a:off x="613463" y="2246614"/>
-            <a:ext cx="834338" cy="834338"/>
-          </a:xfrm>
-          <a:prstGeom prst="rect">
-            <a:avLst/>
-          </a:prstGeom>
-        </p:spPr>
-      </p:pic>
-      <p:pic>
-        <p:nvPicPr>
-          <p:cNvPr id="5" name="Picture 4" descr="A close up of a sign&#10;&#10;Description generated with high confidence">
-            <a:extLst>
-              <a:ext uri="{FF2B5EF4-FFF2-40B4-BE49-F238E27FC236}">
-                <a16:creationId xmlns:a16="http://schemas.microsoft.com/office/drawing/2014/main" id="{E4D0BC29-8BFA-436F-9690-A6ED7D9D7336}"/>
-              </a:ext>
-            </a:extLst>
-          </p:cNvPr>
-          <p:cNvPicPr>
-            <a:picLocks noChangeAspect="1"/>
-          </p:cNvPicPr>
-          <p:nvPr/>
-        </p:nvPicPr>
-        <p:blipFill>
-          <a:blip r:embed="rId2"/>
-          <a:stretch>
-            <a:fillRect/>
-          </a:stretch>
-        </p:blipFill>
-        <p:spPr>
-          <a:xfrm>
-            <a:off x="5440836" y="1951275"/>
-            <a:ext cx="834338" cy="834338"/>
-          </a:xfrm>
-          <a:prstGeom prst="rect">
-            <a:avLst/>
-          </a:prstGeom>
-        </p:spPr>
-      </p:pic>
-      <p:pic>
-        <p:nvPicPr>
-          <p:cNvPr id="6" name="Picture 5" descr="A close up of a sign&#10;&#10;Description generated with high confidence">
-            <a:extLst>
-              <a:ext uri="{FF2B5EF4-FFF2-40B4-BE49-F238E27FC236}">
-                <a16:creationId xmlns:a16="http://schemas.microsoft.com/office/drawing/2014/main" id="{3EC4F6CD-CC88-4CE2-9569-60D2C20EF256}"/>
-              </a:ext>
-            </a:extLst>
-          </p:cNvPr>
-          <p:cNvPicPr>
-            <a:picLocks noChangeAspect="1"/>
-          </p:cNvPicPr>
-          <p:nvPr/>
-        </p:nvPicPr>
-        <p:blipFill>
-          <a:blip r:embed="rId2"/>
-          <a:stretch>
-            <a:fillRect/>
-          </a:stretch>
-        </p:blipFill>
-        <p:spPr>
-          <a:xfrm>
-            <a:off x="3582381" y="4329630"/>
-            <a:ext cx="834338" cy="834338"/>
-          </a:xfrm>
-          <a:prstGeom prst="rect">
-            <a:avLst/>
-          </a:prstGeom>
-        </p:spPr>
-      </p:pic>
-      <p:pic>
-        <p:nvPicPr>
-          <p:cNvPr id="7" name="Picture 6" descr="A close up of a sign&#10;&#10;Description generated with high confidence">
-            <a:extLst>
-              <a:ext uri="{FF2B5EF4-FFF2-40B4-BE49-F238E27FC236}">
-                <a16:creationId xmlns:a16="http://schemas.microsoft.com/office/drawing/2014/main" id="{AC6E4746-6357-4297-B56A-D244BF64E74F}"/>
-              </a:ext>
-            </a:extLst>
-          </p:cNvPr>
-          <p:cNvPicPr>
-            <a:picLocks noChangeAspect="1"/>
-          </p:cNvPicPr>
-          <p:nvPr/>
-        </p:nvPicPr>
-        <p:blipFill>
-          <a:blip r:embed="rId2"/>
-          <a:stretch>
-            <a:fillRect/>
-          </a:stretch>
-        </p:blipFill>
-        <p:spPr>
-          <a:xfrm>
-            <a:off x="5665575" y="4066665"/>
-            <a:ext cx="834338" cy="834338"/>
-          </a:xfrm>
-          <a:prstGeom prst="rect">
-            <a:avLst/>
-          </a:prstGeom>
-        </p:spPr>
-      </p:pic>
-      <p:pic>
-        <p:nvPicPr>
-          <p:cNvPr id="8" name="Picture 7" descr="A close up of a sign&#10;&#10;Description generated with high confidence">
-            <a:extLst>
-              <a:ext uri="{FF2B5EF4-FFF2-40B4-BE49-F238E27FC236}">
-                <a16:creationId xmlns:a16="http://schemas.microsoft.com/office/drawing/2014/main" id="{9E6F5980-C63F-4B1C-B1A7-39E72E4A7E8B}"/>
-              </a:ext>
-            </a:extLst>
-          </p:cNvPr>
-          <p:cNvPicPr>
-            <a:picLocks noChangeAspect="1"/>
-          </p:cNvPicPr>
-          <p:nvPr/>
-        </p:nvPicPr>
-        <p:blipFill>
-          <a:blip r:embed="rId2"/>
-          <a:stretch>
-            <a:fillRect/>
-          </a:stretch>
-        </p:blipFill>
-        <p:spPr>
-          <a:xfrm>
-            <a:off x="1321917" y="4066665"/>
-            <a:ext cx="834338" cy="834338"/>
-          </a:xfrm>
-          <a:prstGeom prst="rect">
-            <a:avLst/>
-          </a:prstGeom>
-        </p:spPr>
-      </p:pic>
-      <p:pic>
-        <p:nvPicPr>
-          <p:cNvPr id="9" name="Picture 8" descr="A close up of a sign&#10;&#10;Description generated with high confidence">
-            <a:extLst>
-              <a:ext uri="{FF2B5EF4-FFF2-40B4-BE49-F238E27FC236}">
-                <a16:creationId xmlns:a16="http://schemas.microsoft.com/office/drawing/2014/main" id="{12FD7EC7-B21A-4F44-957D-19383A3A217A}"/>
-              </a:ext>
-            </a:extLst>
-          </p:cNvPr>
-          <p:cNvPicPr>
-            <a:picLocks noChangeAspect="1"/>
-          </p:cNvPicPr>
-          <p:nvPr/>
-        </p:nvPicPr>
-        <p:blipFill>
-          <a:blip r:embed="rId2"/>
-          <a:stretch>
-            <a:fillRect/>
-          </a:stretch>
-        </p:blipFill>
-        <p:spPr>
-          <a:xfrm>
-            <a:off x="2837680" y="1378167"/>
-            <a:ext cx="834338" cy="834338"/>
-          </a:xfrm>
-          <a:prstGeom prst="rect">
-            <a:avLst/>
-          </a:prstGeom>
-        </p:spPr>
-      </p:pic>
-      <p:sp>
-        <p:nvSpPr>
-          <p:cNvPr id="2" name="Freeform: Shape 1">
-            <a:extLst>
-              <a:ext uri="{FF2B5EF4-FFF2-40B4-BE49-F238E27FC236}">
-                <a16:creationId xmlns:a16="http://schemas.microsoft.com/office/drawing/2014/main" id="{C99DFEC3-7CC7-41D0-BA42-8CC9B36E39D1}"/>
-              </a:ext>
-            </a:extLst>
-          </p:cNvPr>
-          <p:cNvSpPr/>
-          <p:nvPr/>
-        </p:nvSpPr>
-        <p:spPr>
-          <a:xfrm>
-            <a:off x="1252151" y="1565189"/>
-            <a:ext cx="1285103" cy="345989"/>
-          </a:xfrm>
-          <a:custGeom>
-            <a:avLst/>
-            <a:gdLst>
-              <a:gd name="connsiteX0" fmla="*/ 0 w 1285103"/>
-              <a:gd name="connsiteY0" fmla="*/ 345989 h 345989"/>
-              <a:gd name="connsiteX1" fmla="*/ 1285103 w 1285103"/>
-              <a:gd name="connsiteY1" fmla="*/ 0 h 345989"/>
-              <a:gd name="connsiteX2" fmla="*/ 1285103 w 1285103"/>
-              <a:gd name="connsiteY2" fmla="*/ 0 h 345989"/>
-            </a:gdLst>
-            <a:ahLst/>
-            <a:cxnLst>
-              <a:cxn ang="0">
-                <a:pos x="connsiteX0" y="connsiteY0"/>
-              </a:cxn>
-              <a:cxn ang="0">
-                <a:pos x="connsiteX1" y="connsiteY1"/>
-              </a:cxn>
-              <a:cxn ang="0">
-                <a:pos x="connsiteX2" y="connsiteY2"/>
-              </a:cxn>
-            </a:cxnLst>
-            <a:rect l="l" t="t" r="r" b="b"/>
-            <a:pathLst>
-              <a:path w="1285103" h="345989">
-                <a:moveTo>
-                  <a:pt x="0" y="345989"/>
-                </a:moveTo>
-                <a:lnTo>
-                  <a:pt x="1285103" y="0"/>
-                </a:lnTo>
-                <a:lnTo>
-                  <a:pt x="1285103" y="0"/>
-                </a:lnTo>
-              </a:path>
-            </a:pathLst>
-          </a:custGeom>
-          <a:noFill/>
-          <a:ln w="57150">
-            <a:solidFill>
-              <a:schemeClr val="accent3"/>
-            </a:solidFill>
-            <a:prstDash val="dash"/>
-          </a:ln>
-        </p:spPr>
-        <p:style>
-          <a:lnRef idx="2">
-            <a:schemeClr val="accent1">
-              <a:shade val="50000"/>
-            </a:schemeClr>
-          </a:lnRef>
-          <a:fillRef idx="1">
-            <a:schemeClr val="accent1"/>
-          </a:fillRef>
-          <a:effectRef idx="0">
-            <a:schemeClr val="accent1"/>
-          </a:effectRef>
-          <a:fontRef idx="minor">
-            <a:schemeClr val="lt1"/>
-          </a:fontRef>
-        </p:style>
-        <p:txBody>
-          <a:bodyPr rtlCol="0" anchor="ctr"/>
-          <a:lstStyle/>
-          <a:p>
-            <a:pPr algn="ctr"/>
-            <a:endParaRPr lang="en-US"/>
-          </a:p>
-        </p:txBody>
-      </p:sp>
-      <p:cxnSp>
-        <p:nvCxnSpPr>
-          <p:cNvPr id="11" name="Straight Connector 10">
-            <a:extLst>
-              <a:ext uri="{FF2B5EF4-FFF2-40B4-BE49-F238E27FC236}">
-                <a16:creationId xmlns:a16="http://schemas.microsoft.com/office/drawing/2014/main" id="{DC14B478-832B-439F-AA0A-FC7CFFB95DBF}"/>
-              </a:ext>
-            </a:extLst>
-          </p:cNvPr>
-          <p:cNvCxnSpPr/>
-          <p:nvPr/>
-        </p:nvCxnSpPr>
-        <p:spPr>
-          <a:xfrm flipH="1">
-            <a:off x="1853514" y="2339546"/>
-            <a:ext cx="1210962" cy="1458097"/>
-          </a:xfrm>
-          <a:prstGeom prst="line">
-            <a:avLst/>
-          </a:prstGeom>
-          <a:ln w="76200">
-            <a:solidFill>
-              <a:srgbClr val="FF0000"/>
-            </a:solidFill>
-            <a:prstDash val="dash"/>
-          </a:ln>
-        </p:spPr>
-        <p:style>
-          <a:lnRef idx="1">
-            <a:schemeClr val="accent1"/>
-          </a:lnRef>
-          <a:fillRef idx="0">
-            <a:schemeClr val="accent1"/>
-          </a:fillRef>
-          <a:effectRef idx="0">
-            <a:schemeClr val="accent1"/>
-          </a:effectRef>
-          <a:fontRef idx="minor">
-            <a:schemeClr val="tx1"/>
-          </a:fontRef>
-        </p:style>
-      </p:cxnSp>
-      <p:cxnSp>
-        <p:nvCxnSpPr>
-          <p:cNvPr id="13" name="Straight Connector 12">
-            <a:extLst>
-              <a:ext uri="{FF2B5EF4-FFF2-40B4-BE49-F238E27FC236}">
-                <a16:creationId xmlns:a16="http://schemas.microsoft.com/office/drawing/2014/main" id="{405CF20C-7733-47B0-BAC5-EFD6BD497568}"/>
-              </a:ext>
-            </a:extLst>
-          </p:cNvPr>
-          <p:cNvCxnSpPr/>
-          <p:nvPr/>
-        </p:nvCxnSpPr>
-        <p:spPr>
-          <a:xfrm>
-            <a:off x="2273643" y="4456670"/>
-            <a:ext cx="1210962" cy="205946"/>
-          </a:xfrm>
-          <a:prstGeom prst="line">
-            <a:avLst/>
-          </a:prstGeom>
-          <a:ln w="76200">
-            <a:solidFill>
-              <a:srgbClr val="FF0000"/>
-            </a:solidFill>
-            <a:prstDash val="dash"/>
-          </a:ln>
-        </p:spPr>
-        <p:style>
-          <a:lnRef idx="1">
-            <a:schemeClr val="accent1"/>
-          </a:lnRef>
-          <a:fillRef idx="0">
-            <a:schemeClr val="accent1"/>
-          </a:fillRef>
-          <a:effectRef idx="0">
-            <a:schemeClr val="accent1"/>
-          </a:effectRef>
-          <a:fontRef idx="minor">
-            <a:schemeClr val="tx1"/>
-          </a:fontRef>
-        </p:style>
-      </p:cxnSp>
-      <p:cxnSp>
-        <p:nvCxnSpPr>
-          <p:cNvPr id="19" name="Straight Connector 18">
-            <a:extLst>
-              <a:ext uri="{FF2B5EF4-FFF2-40B4-BE49-F238E27FC236}">
-                <a16:creationId xmlns:a16="http://schemas.microsoft.com/office/drawing/2014/main" id="{C435040B-9E12-4C41-95BD-449DABEA9823}"/>
-              </a:ext>
-            </a:extLst>
-          </p:cNvPr>
-          <p:cNvCxnSpPr/>
-          <p:nvPr/>
-        </p:nvCxnSpPr>
-        <p:spPr>
-          <a:xfrm flipV="1">
-            <a:off x="4852086" y="4329630"/>
-            <a:ext cx="691979" cy="217656"/>
-          </a:xfrm>
-          <a:prstGeom prst="line">
-            <a:avLst/>
-          </a:prstGeom>
-          <a:ln w="76200">
-            <a:solidFill>
-              <a:srgbClr val="FF0000"/>
-            </a:solidFill>
-            <a:prstDash val="dash"/>
-          </a:ln>
-        </p:spPr>
-        <p:style>
-          <a:lnRef idx="1">
-            <a:schemeClr val="accent1"/>
-          </a:lnRef>
-          <a:fillRef idx="0">
-            <a:schemeClr val="accent1"/>
-          </a:fillRef>
-          <a:effectRef idx="0">
-            <a:schemeClr val="accent1"/>
-          </a:effectRef>
-          <a:fontRef idx="minor">
-            <a:schemeClr val="tx1"/>
-          </a:fontRef>
-        </p:style>
-      </p:cxnSp>
-      <p:cxnSp>
-        <p:nvCxnSpPr>
-          <p:cNvPr id="21" name="Straight Connector 20">
-            <a:extLst>
-              <a:ext uri="{FF2B5EF4-FFF2-40B4-BE49-F238E27FC236}">
-                <a16:creationId xmlns:a16="http://schemas.microsoft.com/office/drawing/2014/main" id="{DA75733B-58CA-4974-8251-2B4F5887E571}"/>
-              </a:ext>
-            </a:extLst>
-          </p:cNvPr>
-          <p:cNvCxnSpPr/>
-          <p:nvPr/>
-        </p:nvCxnSpPr>
-        <p:spPr>
-          <a:xfrm>
-            <a:off x="5988908" y="2899719"/>
-            <a:ext cx="0" cy="897924"/>
-          </a:xfrm>
-          <a:prstGeom prst="line">
-            <a:avLst/>
-          </a:prstGeom>
-          <a:ln w="76200">
-            <a:solidFill>
-              <a:srgbClr val="FF0000"/>
-            </a:solidFill>
-            <a:prstDash val="dash"/>
-          </a:ln>
-        </p:spPr>
-        <p:style>
-          <a:lnRef idx="1">
-            <a:schemeClr val="accent1"/>
-          </a:lnRef>
-          <a:fillRef idx="0">
-            <a:schemeClr val="accent1"/>
-          </a:fillRef>
-          <a:effectRef idx="0">
-            <a:schemeClr val="accent1"/>
-          </a:effectRef>
-          <a:fontRef idx="minor">
-            <a:schemeClr val="tx1"/>
-          </a:fontRef>
-        </p:style>
-      </p:cxnSp>
-      <p:pic>
-        <p:nvPicPr>
-          <p:cNvPr id="23" name="Graphic 22" descr="Laptop">
-            <a:extLst>
-              <a:ext uri="{FF2B5EF4-FFF2-40B4-BE49-F238E27FC236}">
-                <a16:creationId xmlns:a16="http://schemas.microsoft.com/office/drawing/2014/main" id="{BEF0786E-4BC7-4B5F-ACBE-97A937181652}"/>
-              </a:ext>
-            </a:extLst>
-          </p:cNvPr>
-          <p:cNvPicPr>
-            <a:picLocks noChangeAspect="1"/>
-          </p:cNvPicPr>
-          <p:nvPr/>
-        </p:nvPicPr>
-        <p:blipFill>
-          <a:blip r:embed="rId3">
-            <a:extLst>
-              <a:ext uri="{96DAC541-7B7A-43D3-8B79-37D633B846F1}">
-                <asvg:svgBlip xmlns:asvg="http://schemas.microsoft.com/office/drawing/2016/SVG/main" r:embed="rId4"/>
-              </a:ext>
-            </a:extLst>
-          </a:blip>
-          <a:stretch>
-            <a:fillRect/>
-          </a:stretch>
-        </p:blipFill>
-        <p:spPr>
-          <a:xfrm>
-            <a:off x="7554097" y="3739978"/>
-            <a:ext cx="914400" cy="914400"/>
-          </a:xfrm>
-          <a:prstGeom prst="rect">
-            <a:avLst/>
-          </a:prstGeom>
-          <a:effectLst>
-            <a:outerShdw blurRad="50800" dist="38100" dir="16200000" rotWithShape="0">
-              <a:prstClr val="black">
-                <a:alpha val="40000"/>
-              </a:prstClr>
-            </a:outerShdw>
-          </a:effectLst>
-        </p:spPr>
-      </p:pic>
-      <p:cxnSp>
-        <p:nvCxnSpPr>
-          <p:cNvPr id="25" name="Straight Connector 24">
-            <a:extLst>
-              <a:ext uri="{FF2B5EF4-FFF2-40B4-BE49-F238E27FC236}">
-                <a16:creationId xmlns:a16="http://schemas.microsoft.com/office/drawing/2014/main" id="{66F28968-FB5C-4427-ACF0-1C27F06147D1}"/>
-              </a:ext>
-            </a:extLst>
-          </p:cNvPr>
-          <p:cNvCxnSpPr/>
-          <p:nvPr/>
-        </p:nvCxnSpPr>
-        <p:spPr>
-          <a:xfrm flipV="1">
-            <a:off x="6763265" y="3937686"/>
-            <a:ext cx="716692" cy="259492"/>
-          </a:xfrm>
-          <a:prstGeom prst="line">
-            <a:avLst/>
-          </a:prstGeom>
-          <a:ln w="76200">
-            <a:solidFill>
-              <a:srgbClr val="FF0000"/>
-            </a:solidFill>
-            <a:prstDash val="dash"/>
-          </a:ln>
-        </p:spPr>
-        <p:style>
-          <a:lnRef idx="1">
-            <a:schemeClr val="accent1"/>
-          </a:lnRef>
-          <a:fillRef idx="0">
-            <a:schemeClr val="accent1"/>
-          </a:fillRef>
-          <a:effectRef idx="0">
-            <a:schemeClr val="accent1"/>
-          </a:effectRef>
-          <a:fontRef idx="minor">
-            <a:schemeClr val="tx1"/>
-          </a:fontRef>
-        </p:style>
-      </p:cxnSp>
-    </p:spTree>
-    <p:extLst>
-      <p:ext uri="{BB962C8B-B14F-4D97-AF65-F5344CB8AC3E}">
-        <p14:creationId xmlns:p14="http://schemas.microsoft.com/office/powerpoint/2010/main" val="3959680740"/>
-      </p:ext>
-    </p:extLst>
-  </p:cSld>
-  <p:clrMapOvr>
-    <a:masterClrMapping/>
-  </p:clrMapOvr>
-  <mc:AlternateContent xmlns:mc="http://schemas.openxmlformats.org/markup-compatibility/2006" xmlns:p159="http://schemas.microsoft.com/office/powerpoint/2015/09/main">
-    <mc:Choice Requires="p159">
-      <p:transition xmlns:p14="http://schemas.microsoft.com/office/powerpoint/2010/main" spd="slow" p14:dur="2000">
-        <p159:morph option="byObject"/>
-      </p:transition>
-    </mc:Choice>
-    <mc:Fallback xmlns="">
-      <p:transition spd="slow">
-        <p:fade/>
-      </p:transition>
-    </mc:Fallback>
-  </mc:AlternateContent>
-  <p:timing>
-    <p:tnLst>
-      <p:par>
-        <p:cTn id="1" dur="indefinite" restart="never" nodeType="tmRoot">
-          <p:childTnLst>
-            <p:seq concurrent="1" nextAc="seek">
-              <p:cTn id="2" dur="indefinite" nodeType="mainSeq">
-                <p:childTnLst>
-                  <p:par>
-                    <p:cTn id="3" fill="hold">
-                      <p:stCondLst>
-                        <p:cond delay="indefinite"/>
-                      </p:stCondLst>
-                      <p:childTnLst>
-                        <p:par>
-                          <p:cTn id="4" fill="hold">
-                            <p:stCondLst>
-                              <p:cond delay="0"/>
-                            </p:stCondLst>
-                            <p:childTnLst>
-                              <p:par>
-                                <p:cTn id="5" presetID="1" presetClass="entr" presetSubtype="0" fill="hold" nodeType="clickEffect">
-                                  <p:stCondLst>
-                                    <p:cond delay="0"/>
-                                  </p:stCondLst>
-                                  <p:childTnLst>
-                                    <p:set>
-                                      <p:cBhvr>
-                                        <p:cTn id="6" dur="1" fill="hold">
-                                          <p:stCondLst>
-                                            <p:cond delay="0"/>
-                                          </p:stCondLst>
-                                        </p:cTn>
-                                        <p:tgtEl>
-                                          <p:spTgt spid="11"/>
-                                        </p:tgtEl>
-                                        <p:attrNameLst>
-                                          <p:attrName>style.visibility</p:attrName>
-                                        </p:attrNameLst>
-                                      </p:cBhvr>
-                                      <p:to>
-                                        <p:strVal val="visible"/>
-                                      </p:to>
-                                    </p:set>
-                                  </p:childTnLst>
-                                </p:cTn>
-                              </p:par>
-                              <p:par>
-                                <p:cTn id="7" presetID="1" presetClass="entr" presetSubtype="0" fill="hold" nodeType="withEffect">
-                                  <p:stCondLst>
-                                    <p:cond delay="0"/>
-                                  </p:stCondLst>
-                                  <p:childTnLst>
-                                    <p:set>
-                                      <p:cBhvr>
-                                        <p:cTn id="8" dur="1" fill="hold">
-                                          <p:stCondLst>
-                                            <p:cond delay="0"/>
-                                          </p:stCondLst>
-                                        </p:cTn>
-                                        <p:tgtEl>
-                                          <p:spTgt spid="13"/>
-                                        </p:tgtEl>
-                                        <p:attrNameLst>
-                                          <p:attrName>style.visibility</p:attrName>
-                                        </p:attrNameLst>
-                                      </p:cBhvr>
-                                      <p:to>
-                                        <p:strVal val="visible"/>
-                                      </p:to>
-                                    </p:set>
-                                  </p:childTnLst>
-                                </p:cTn>
-                              </p:par>
-                              <p:par>
-                                <p:cTn id="9" presetID="1" presetClass="entr" presetSubtype="0" fill="hold" nodeType="withEffect">
-                                  <p:stCondLst>
-                                    <p:cond delay="0"/>
-                                  </p:stCondLst>
-                                  <p:childTnLst>
-                                    <p:set>
-                                      <p:cBhvr>
-                                        <p:cTn id="10" dur="1" fill="hold">
-                                          <p:stCondLst>
-                                            <p:cond delay="0"/>
-                                          </p:stCondLst>
-                                        </p:cTn>
-                                        <p:tgtEl>
-                                          <p:spTgt spid="19"/>
-                                        </p:tgtEl>
-                                        <p:attrNameLst>
-                                          <p:attrName>style.visibility</p:attrName>
-                                        </p:attrNameLst>
-                                      </p:cBhvr>
-                                      <p:to>
-                                        <p:strVal val="visible"/>
-                                      </p:to>
-                                    </p:set>
-                                  </p:childTnLst>
-                                </p:cTn>
-                              </p:par>
-                              <p:par>
-                                <p:cTn id="11" presetID="1" presetClass="entr" presetSubtype="0" fill="hold" nodeType="withEffect">
-                                  <p:stCondLst>
-                                    <p:cond delay="0"/>
-                                  </p:stCondLst>
-                                  <p:childTnLst>
-                                    <p:set>
-                                      <p:cBhvr>
-                                        <p:cTn id="12" dur="1" fill="hold">
-                                          <p:stCondLst>
-                                            <p:cond delay="0"/>
-                                          </p:stCondLst>
-                                        </p:cTn>
-                                        <p:tgtEl>
-                                          <p:spTgt spid="21"/>
-                                        </p:tgtEl>
-                                        <p:attrNameLst>
-                                          <p:attrName>style.visibility</p:attrName>
-                                        </p:attrNameLst>
-                                      </p:cBhvr>
-                                      <p:to>
-                                        <p:strVal val="visible"/>
-                                      </p:to>
-                                    </p:set>
-                                  </p:childTnLst>
-                                </p:cTn>
-                              </p:par>
-                              <p:par>
-                                <p:cTn id="13" presetID="1" presetClass="entr" presetSubtype="0" fill="hold" grpId="0" nodeType="withEffect">
-                                  <p:stCondLst>
-                                    <p:cond delay="0"/>
-                                  </p:stCondLst>
-                                  <p:childTnLst>
-                                    <p:set>
-                                      <p:cBhvr>
-                                        <p:cTn id="14" dur="1" fill="hold">
-                                          <p:stCondLst>
-                                            <p:cond delay="0"/>
-                                          </p:stCondLst>
-                                        </p:cTn>
-                                        <p:tgtEl>
-                                          <p:spTgt spid="2"/>
-                                        </p:tgtEl>
-                                        <p:attrNameLst>
-                                          <p:attrName>style.visibility</p:attrName>
-                                        </p:attrNameLst>
-                                      </p:cBhvr>
-                                      <p:to>
-                                        <p:strVal val="visible"/>
-                                      </p:to>
-                                    </p:set>
-                                  </p:childTnLst>
-                                </p:cTn>
-                              </p:par>
-                            </p:childTnLst>
-                          </p:cTn>
-                        </p:par>
-                      </p:childTnLst>
-                    </p:cTn>
-                  </p:par>
-                  <p:par>
-                    <p:cTn id="15" fill="hold">
-                      <p:stCondLst>
-                        <p:cond delay="indefinite"/>
-                      </p:stCondLst>
-                      <p:childTnLst>
-                        <p:par>
-                          <p:cTn id="16" fill="hold">
-                            <p:stCondLst>
-                              <p:cond delay="0"/>
-                            </p:stCondLst>
-                            <p:childTnLst>
-                              <p:par>
-                                <p:cTn id="17" presetID="1" presetClass="entr" presetSubtype="0" fill="hold" nodeType="clickEffect">
-                                  <p:stCondLst>
-                                    <p:cond delay="0"/>
-                                  </p:stCondLst>
-                                  <p:childTnLst>
-                                    <p:set>
-                                      <p:cBhvr>
-                                        <p:cTn id="18" dur="1" fill="hold">
-                                          <p:stCondLst>
-                                            <p:cond delay="0"/>
-                                          </p:stCondLst>
-                                        </p:cTn>
-                                        <p:tgtEl>
-                                          <p:spTgt spid="25"/>
-                                        </p:tgtEl>
-                                        <p:attrNameLst>
-                                          <p:attrName>style.visibility</p:attrName>
-                                        </p:attrNameLst>
-                                      </p:cBhvr>
-                                      <p:to>
-                                        <p:strVal val="visible"/>
-                                      </p:to>
-                                    </p:set>
-                                  </p:childTnLst>
-                                </p:cTn>
-                              </p:par>
-                              <p:par>
-                                <p:cTn id="19" presetID="1" presetClass="entr" presetSubtype="0" fill="hold" nodeType="withEffect">
-                                  <p:stCondLst>
-                                    <p:cond delay="0"/>
-                                  </p:stCondLst>
-                                  <p:childTnLst>
-                                    <p:set>
-                                      <p:cBhvr>
-                                        <p:cTn id="20" dur="1" fill="hold">
-                                          <p:stCondLst>
-                                            <p:cond delay="0"/>
-                                          </p:stCondLst>
-                                        </p:cTn>
-                                        <p:tgtEl>
-                                          <p:spTgt spid="23"/>
-                                        </p:tgtEl>
-                                        <p:attrNameLst>
-                                          <p:attrName>style.visibility</p:attrName>
-                                        </p:attrNameLst>
-                                      </p:cBhvr>
-                                      <p:to>
-                                        <p:strVal val="visible"/>
-                                      </p:to>
-                                    </p:set>
-                                  </p:childTnLst>
-                                </p:cTn>
-                              </p:par>
-                            </p:childTnLst>
-                          </p:cTn>
-                        </p:par>
-                      </p:childTnLst>
-                    </p:cTn>
-                  </p:par>
-                </p:childTnLst>
-              </p:cTn>
-              <p:prevCondLst>
-                <p:cond evt="onPrev" delay="0">
-                  <p:tgtEl>
-                    <p:sldTgt/>
-                  </p:tgtEl>
-                </p:cond>
-              </p:prevCondLst>
-              <p:nextCondLst>
-                <p:cond evt="onNext" delay="0">
-                  <p:tgtEl>
-                    <p:sldTgt/>
-                  </p:tgtEl>
-                </p:cond>
-              </p:nextCondLst>
-            </p:seq>
-          </p:childTnLst>
-        </p:cTn>
-      </p:par>
-    </p:tnLst>
-    <p:bldLst>
-      <p:bldP spid="2" grpId="0" animBg="1"/>
-    </p:bldLst>
-  </p:timing>
-</p:sld>
-</file>
-
-<file path=ppt/slides/slide7.xml><?xml version="1.0" encoding="utf-8"?>
-<p:sld xmlns:a="http://schemas.openxmlformats.org/drawingml/2006/main" xmlns:r="http://schemas.openxmlformats.org/officeDocument/2006/relationships" xmlns:p="http://schemas.openxmlformats.org/presentationml/2006/main">
-  <p:cSld>
-    <p:spTree>
-      <p:nvGrpSpPr>
-        <p:cNvPr id="1" name=""/>
-        <p:cNvGrpSpPr/>
-        <p:nvPr/>
-      </p:nvGrpSpPr>
-      <p:grpSpPr>
-        <a:xfrm>
-          <a:off x="0" y="0"/>
-          <a:ext cx="0" cy="0"/>
-          <a:chOff x="0" y="0"/>
-          <a:chExt cx="0" cy="0"/>
-        </a:xfrm>
-      </p:grpSpPr>
-      <p:sp>
-        <p:nvSpPr>
-          <p:cNvPr id="3" name="Title 2">
-            <a:extLst>
-              <a:ext uri="{FF2B5EF4-FFF2-40B4-BE49-F238E27FC236}">
-                <a16:creationId xmlns:a16="http://schemas.microsoft.com/office/drawing/2014/main" id="{E3EA8F3D-5E80-47FC-B604-B77B30D5F33E}"/>
-              </a:ext>
-            </a:extLst>
-          </p:cNvPr>
-          <p:cNvSpPr>
-            <a:spLocks noGrp="1"/>
-          </p:cNvSpPr>
-          <p:nvPr>
-            <p:ph type="title"/>
-          </p:nvPr>
-        </p:nvSpPr>
-        <p:spPr>
-          <a:xfrm>
-            <a:off x="500446" y="400840"/>
-            <a:ext cx="6526336" cy="826598"/>
-          </a:xfrm>
-        </p:spPr>
-        <p:txBody>
-          <a:bodyPr/>
-          <a:lstStyle/>
-          <a:p>
-            <a:r>
-              <a:rPr lang="en-US" sz="4800" dirty="0">
-                <a:latin typeface="Calibri" panose="020F0502020204030204" pitchFamily="34" charset="0"/>
-                <a:cs typeface="Calibri" panose="020F0502020204030204" pitchFamily="34" charset="0"/>
-              </a:rPr>
-              <a:t>IoT</a:t>
-            </a:r>
-          </a:p>
-        </p:txBody>
-      </p:sp>
-      <p:pic>
-        <p:nvPicPr>
-          <p:cNvPr id="4" name="Picture 3" descr="A close up of a sign&#10;&#10;Description generated with high confidence">
-            <a:extLst>
-              <a:ext uri="{FF2B5EF4-FFF2-40B4-BE49-F238E27FC236}">
-                <a16:creationId xmlns:a16="http://schemas.microsoft.com/office/drawing/2014/main" id="{CD43DD65-D872-4793-A99C-92D52F284DC5}"/>
-              </a:ext>
-            </a:extLst>
-          </p:cNvPr>
-          <p:cNvPicPr>
-            <a:picLocks noChangeAspect="1"/>
-          </p:cNvPicPr>
-          <p:nvPr/>
-        </p:nvPicPr>
-        <p:blipFill>
-          <a:blip r:embed="rId2"/>
-          <a:stretch>
-            <a:fillRect/>
-          </a:stretch>
-        </p:blipFill>
-        <p:spPr>
-          <a:xfrm>
-            <a:off x="613463" y="2246614"/>
-            <a:ext cx="834338" cy="834338"/>
-          </a:xfrm>
-          <a:prstGeom prst="rect">
-            <a:avLst/>
-          </a:prstGeom>
-        </p:spPr>
-      </p:pic>
-      <p:pic>
-        <p:nvPicPr>
-          <p:cNvPr id="5" name="Picture 4" descr="A close up of a sign&#10;&#10;Description generated with high confidence">
-            <a:extLst>
-              <a:ext uri="{FF2B5EF4-FFF2-40B4-BE49-F238E27FC236}">
-                <a16:creationId xmlns:a16="http://schemas.microsoft.com/office/drawing/2014/main" id="{E4D0BC29-8BFA-436F-9690-A6ED7D9D7336}"/>
-              </a:ext>
-            </a:extLst>
-          </p:cNvPr>
-          <p:cNvPicPr>
-            <a:picLocks noChangeAspect="1"/>
-          </p:cNvPicPr>
-          <p:nvPr/>
-        </p:nvPicPr>
-        <p:blipFill>
-          <a:blip r:embed="rId2"/>
-          <a:stretch>
-            <a:fillRect/>
-          </a:stretch>
-        </p:blipFill>
-        <p:spPr>
-          <a:xfrm>
-            <a:off x="5440836" y="1951275"/>
-            <a:ext cx="834338" cy="834338"/>
-          </a:xfrm>
-          <a:prstGeom prst="rect">
-            <a:avLst/>
-          </a:prstGeom>
-        </p:spPr>
-      </p:pic>
-      <p:pic>
-        <p:nvPicPr>
-          <p:cNvPr id="6" name="Picture 5" descr="A close up of a sign&#10;&#10;Description generated with high confidence">
-            <a:extLst>
-              <a:ext uri="{FF2B5EF4-FFF2-40B4-BE49-F238E27FC236}">
-                <a16:creationId xmlns:a16="http://schemas.microsoft.com/office/drawing/2014/main" id="{3EC4F6CD-CC88-4CE2-9569-60D2C20EF256}"/>
-              </a:ext>
-            </a:extLst>
-          </p:cNvPr>
-          <p:cNvPicPr>
-            <a:picLocks noChangeAspect="1"/>
-          </p:cNvPicPr>
-          <p:nvPr/>
-        </p:nvPicPr>
-        <p:blipFill>
-          <a:blip r:embed="rId2"/>
-          <a:stretch>
-            <a:fillRect/>
-          </a:stretch>
-        </p:blipFill>
-        <p:spPr>
-          <a:xfrm>
-            <a:off x="3582381" y="4329630"/>
-            <a:ext cx="834338" cy="834338"/>
-          </a:xfrm>
-          <a:prstGeom prst="rect">
-            <a:avLst/>
-          </a:prstGeom>
-        </p:spPr>
-      </p:pic>
-      <p:pic>
-        <p:nvPicPr>
-          <p:cNvPr id="7" name="Picture 6" descr="A close up of a sign&#10;&#10;Description generated with high confidence">
-            <a:extLst>
-              <a:ext uri="{FF2B5EF4-FFF2-40B4-BE49-F238E27FC236}">
-                <a16:creationId xmlns:a16="http://schemas.microsoft.com/office/drawing/2014/main" id="{AC6E4746-6357-4297-B56A-D244BF64E74F}"/>
-              </a:ext>
-            </a:extLst>
-          </p:cNvPr>
-          <p:cNvPicPr>
-            <a:picLocks noChangeAspect="1"/>
-          </p:cNvPicPr>
-          <p:nvPr/>
-        </p:nvPicPr>
-        <p:blipFill>
-          <a:blip r:embed="rId2"/>
-          <a:stretch>
-            <a:fillRect/>
-          </a:stretch>
-        </p:blipFill>
-        <p:spPr>
-          <a:xfrm>
-            <a:off x="5665575" y="4066665"/>
-            <a:ext cx="834338" cy="834338"/>
-          </a:xfrm>
-          <a:prstGeom prst="rect">
-            <a:avLst/>
-          </a:prstGeom>
-        </p:spPr>
-      </p:pic>
-      <p:pic>
-        <p:nvPicPr>
-          <p:cNvPr id="8" name="Picture 7" descr="A close up of a sign&#10;&#10;Description generated with high confidence">
-            <a:extLst>
-              <a:ext uri="{FF2B5EF4-FFF2-40B4-BE49-F238E27FC236}">
-                <a16:creationId xmlns:a16="http://schemas.microsoft.com/office/drawing/2014/main" id="{9E6F5980-C63F-4B1C-B1A7-39E72E4A7E8B}"/>
-              </a:ext>
-            </a:extLst>
-          </p:cNvPr>
-          <p:cNvPicPr>
-            <a:picLocks noChangeAspect="1"/>
-          </p:cNvPicPr>
-          <p:nvPr/>
-        </p:nvPicPr>
-        <p:blipFill>
-          <a:blip r:embed="rId2"/>
-          <a:stretch>
-            <a:fillRect/>
-          </a:stretch>
-        </p:blipFill>
-        <p:spPr>
-          <a:xfrm>
-            <a:off x="1321917" y="4066665"/>
-            <a:ext cx="834338" cy="834338"/>
-          </a:xfrm>
-          <a:prstGeom prst="rect">
-            <a:avLst/>
-          </a:prstGeom>
-        </p:spPr>
-      </p:pic>
-      <p:pic>
-        <p:nvPicPr>
-          <p:cNvPr id="9" name="Picture 8" descr="A close up of a sign&#10;&#10;Description generated with high confidence">
-            <a:extLst>
-              <a:ext uri="{FF2B5EF4-FFF2-40B4-BE49-F238E27FC236}">
-                <a16:creationId xmlns:a16="http://schemas.microsoft.com/office/drawing/2014/main" id="{12FD7EC7-B21A-4F44-957D-19383A3A217A}"/>
-              </a:ext>
-            </a:extLst>
-          </p:cNvPr>
-          <p:cNvPicPr>
-            <a:picLocks noChangeAspect="1"/>
-          </p:cNvPicPr>
-          <p:nvPr/>
-        </p:nvPicPr>
-        <p:blipFill>
-          <a:blip r:embed="rId2"/>
-          <a:stretch>
-            <a:fillRect/>
-          </a:stretch>
-        </p:blipFill>
-        <p:spPr>
-          <a:xfrm>
-            <a:off x="2837680" y="1378167"/>
-            <a:ext cx="834338" cy="834338"/>
-          </a:xfrm>
-          <a:prstGeom prst="rect">
-            <a:avLst/>
-          </a:prstGeom>
-        </p:spPr>
-      </p:pic>
-      <p:sp>
-        <p:nvSpPr>
-          <p:cNvPr id="2" name="Freeform: Shape 1">
-            <a:extLst>
-              <a:ext uri="{FF2B5EF4-FFF2-40B4-BE49-F238E27FC236}">
-                <a16:creationId xmlns:a16="http://schemas.microsoft.com/office/drawing/2014/main" id="{C99DFEC3-7CC7-41D0-BA42-8CC9B36E39D1}"/>
-              </a:ext>
-            </a:extLst>
-          </p:cNvPr>
-          <p:cNvSpPr/>
-          <p:nvPr/>
-        </p:nvSpPr>
-        <p:spPr>
-          <a:xfrm>
-            <a:off x="1252151" y="1565189"/>
-            <a:ext cx="1285103" cy="345989"/>
-          </a:xfrm>
-          <a:custGeom>
-            <a:avLst/>
-            <a:gdLst>
-              <a:gd name="connsiteX0" fmla="*/ 0 w 1285103"/>
-              <a:gd name="connsiteY0" fmla="*/ 345989 h 345989"/>
-              <a:gd name="connsiteX1" fmla="*/ 1285103 w 1285103"/>
-              <a:gd name="connsiteY1" fmla="*/ 0 h 345989"/>
-              <a:gd name="connsiteX2" fmla="*/ 1285103 w 1285103"/>
-              <a:gd name="connsiteY2" fmla="*/ 0 h 345989"/>
-            </a:gdLst>
-            <a:ahLst/>
-            <a:cxnLst>
-              <a:cxn ang="0">
-                <a:pos x="connsiteX0" y="connsiteY0"/>
-              </a:cxn>
-              <a:cxn ang="0">
-                <a:pos x="connsiteX1" y="connsiteY1"/>
-              </a:cxn>
-              <a:cxn ang="0">
-                <a:pos x="connsiteX2" y="connsiteY2"/>
-              </a:cxn>
-            </a:cxnLst>
-            <a:rect l="l" t="t" r="r" b="b"/>
-            <a:pathLst>
-              <a:path w="1285103" h="345989">
-                <a:moveTo>
-                  <a:pt x="0" y="345989"/>
-                </a:moveTo>
-                <a:lnTo>
-                  <a:pt x="1285103" y="0"/>
-                </a:lnTo>
-                <a:lnTo>
-                  <a:pt x="1285103" y="0"/>
-                </a:lnTo>
-              </a:path>
-            </a:pathLst>
-          </a:custGeom>
-          <a:noFill/>
-          <a:ln w="57150">
-            <a:solidFill>
-              <a:schemeClr val="accent3"/>
-            </a:solidFill>
-            <a:prstDash val="dash"/>
-          </a:ln>
-        </p:spPr>
-        <p:style>
-          <a:lnRef idx="2">
-            <a:schemeClr val="accent1">
-              <a:shade val="50000"/>
-            </a:schemeClr>
-          </a:lnRef>
-          <a:fillRef idx="1">
-            <a:schemeClr val="accent1"/>
-          </a:fillRef>
-          <a:effectRef idx="0">
-            <a:schemeClr val="accent1"/>
-          </a:effectRef>
-          <a:fontRef idx="minor">
-            <a:schemeClr val="lt1"/>
-          </a:fontRef>
-        </p:style>
-        <p:txBody>
-          <a:bodyPr rtlCol="0" anchor="ctr"/>
-          <a:lstStyle/>
-          <a:p>
-            <a:pPr algn="ctr"/>
-            <a:endParaRPr lang="en-US"/>
-          </a:p>
-        </p:txBody>
-      </p:sp>
-      <p:cxnSp>
-        <p:nvCxnSpPr>
-          <p:cNvPr id="11" name="Straight Connector 10">
-            <a:extLst>
-              <a:ext uri="{FF2B5EF4-FFF2-40B4-BE49-F238E27FC236}">
-                <a16:creationId xmlns:a16="http://schemas.microsoft.com/office/drawing/2014/main" id="{DC14B478-832B-439F-AA0A-FC7CFFB95DBF}"/>
-              </a:ext>
-            </a:extLst>
-          </p:cNvPr>
-          <p:cNvCxnSpPr/>
-          <p:nvPr/>
-        </p:nvCxnSpPr>
-        <p:spPr>
-          <a:xfrm flipH="1">
-            <a:off x="1853514" y="2339546"/>
-            <a:ext cx="1210962" cy="1458097"/>
-          </a:xfrm>
-          <a:prstGeom prst="line">
-            <a:avLst/>
-          </a:prstGeom>
-          <a:ln w="76200">
-            <a:solidFill>
-              <a:srgbClr val="FF0000"/>
-            </a:solidFill>
-            <a:prstDash val="dash"/>
-          </a:ln>
-        </p:spPr>
-        <p:style>
-          <a:lnRef idx="1">
-            <a:schemeClr val="accent1"/>
-          </a:lnRef>
-          <a:fillRef idx="0">
-            <a:schemeClr val="accent1"/>
-          </a:fillRef>
-          <a:effectRef idx="0">
-            <a:schemeClr val="accent1"/>
-          </a:effectRef>
-          <a:fontRef idx="minor">
-            <a:schemeClr val="tx1"/>
-          </a:fontRef>
-        </p:style>
-      </p:cxnSp>
-      <p:cxnSp>
-        <p:nvCxnSpPr>
-          <p:cNvPr id="13" name="Straight Connector 12">
-            <a:extLst>
-              <a:ext uri="{FF2B5EF4-FFF2-40B4-BE49-F238E27FC236}">
-                <a16:creationId xmlns:a16="http://schemas.microsoft.com/office/drawing/2014/main" id="{405CF20C-7733-47B0-BAC5-EFD6BD497568}"/>
-              </a:ext>
-            </a:extLst>
-          </p:cNvPr>
-          <p:cNvCxnSpPr/>
-          <p:nvPr/>
-        </p:nvCxnSpPr>
-        <p:spPr>
-          <a:xfrm>
-            <a:off x="2273643" y="4456670"/>
-            <a:ext cx="1210962" cy="205946"/>
-          </a:xfrm>
-          <a:prstGeom prst="line">
-            <a:avLst/>
-          </a:prstGeom>
-          <a:ln w="76200">
-            <a:solidFill>
-              <a:srgbClr val="FF0000"/>
-            </a:solidFill>
-            <a:prstDash val="dash"/>
-          </a:ln>
-        </p:spPr>
-        <p:style>
-          <a:lnRef idx="1">
-            <a:schemeClr val="accent1"/>
-          </a:lnRef>
-          <a:fillRef idx="0">
-            <a:schemeClr val="accent1"/>
-          </a:fillRef>
-          <a:effectRef idx="0">
-            <a:schemeClr val="accent1"/>
-          </a:effectRef>
-          <a:fontRef idx="minor">
-            <a:schemeClr val="tx1"/>
-          </a:fontRef>
-        </p:style>
-      </p:cxnSp>
-      <p:cxnSp>
-        <p:nvCxnSpPr>
-          <p:cNvPr id="19" name="Straight Connector 18">
-            <a:extLst>
-              <a:ext uri="{FF2B5EF4-FFF2-40B4-BE49-F238E27FC236}">
-                <a16:creationId xmlns:a16="http://schemas.microsoft.com/office/drawing/2014/main" id="{C435040B-9E12-4C41-95BD-449DABEA9823}"/>
-              </a:ext>
-            </a:extLst>
-          </p:cNvPr>
-          <p:cNvCxnSpPr/>
-          <p:nvPr/>
-        </p:nvCxnSpPr>
-        <p:spPr>
-          <a:xfrm flipV="1">
-            <a:off x="4852086" y="4329630"/>
-            <a:ext cx="691979" cy="217656"/>
-          </a:xfrm>
-          <a:prstGeom prst="line">
-            <a:avLst/>
-          </a:prstGeom>
-          <a:ln w="76200">
-            <a:solidFill>
-              <a:srgbClr val="FF0000"/>
-            </a:solidFill>
-            <a:prstDash val="dash"/>
-          </a:ln>
-        </p:spPr>
-        <p:style>
-          <a:lnRef idx="1">
-            <a:schemeClr val="accent1"/>
-          </a:lnRef>
-          <a:fillRef idx="0">
-            <a:schemeClr val="accent1"/>
-          </a:fillRef>
-          <a:effectRef idx="0">
-            <a:schemeClr val="accent1"/>
-          </a:effectRef>
-          <a:fontRef idx="minor">
-            <a:schemeClr val="tx1"/>
-          </a:fontRef>
-        </p:style>
-      </p:cxnSp>
-      <p:cxnSp>
-        <p:nvCxnSpPr>
-          <p:cNvPr id="21" name="Straight Connector 20">
-            <a:extLst>
-              <a:ext uri="{FF2B5EF4-FFF2-40B4-BE49-F238E27FC236}">
-                <a16:creationId xmlns:a16="http://schemas.microsoft.com/office/drawing/2014/main" id="{DA75733B-58CA-4974-8251-2B4F5887E571}"/>
-              </a:ext>
-            </a:extLst>
-          </p:cNvPr>
-          <p:cNvCxnSpPr/>
-          <p:nvPr/>
-        </p:nvCxnSpPr>
-        <p:spPr>
-          <a:xfrm>
-            <a:off x="5988908" y="2899719"/>
-            <a:ext cx="0" cy="897924"/>
-          </a:xfrm>
-          <a:prstGeom prst="line">
-            <a:avLst/>
-          </a:prstGeom>
-          <a:ln w="76200">
-            <a:solidFill>
-              <a:srgbClr val="FF0000"/>
-            </a:solidFill>
-            <a:prstDash val="dash"/>
-          </a:ln>
-        </p:spPr>
-        <p:style>
-          <a:lnRef idx="1">
-            <a:schemeClr val="accent1"/>
-          </a:lnRef>
-          <a:fillRef idx="0">
-            <a:schemeClr val="accent1"/>
-          </a:fillRef>
-          <a:effectRef idx="0">
-            <a:schemeClr val="accent1"/>
-          </a:effectRef>
-          <a:fontRef idx="minor">
-            <a:schemeClr val="tx1"/>
-          </a:fontRef>
-        </p:style>
-      </p:cxnSp>
-      <p:pic>
-        <p:nvPicPr>
-          <p:cNvPr id="23" name="Graphic 22" descr="Laptop">
-            <a:extLst>
-              <a:ext uri="{FF2B5EF4-FFF2-40B4-BE49-F238E27FC236}">
-                <a16:creationId xmlns:a16="http://schemas.microsoft.com/office/drawing/2014/main" id="{BEF0786E-4BC7-4B5F-ACBE-97A937181652}"/>
-              </a:ext>
-            </a:extLst>
-          </p:cNvPr>
-          <p:cNvPicPr>
-            <a:picLocks noChangeAspect="1"/>
-          </p:cNvPicPr>
-          <p:nvPr/>
-        </p:nvPicPr>
-        <p:blipFill>
-          <a:blip r:embed="rId3">
-            <a:extLst>
-              <a:ext uri="{96DAC541-7B7A-43D3-8B79-37D633B846F1}">
-                <asvg:svgBlip xmlns:asvg="http://schemas.microsoft.com/office/drawing/2016/SVG/main" r:embed="rId4"/>
-              </a:ext>
-            </a:extLst>
-          </a:blip>
-          <a:stretch>
-            <a:fillRect/>
-          </a:stretch>
-        </p:blipFill>
-        <p:spPr>
-          <a:xfrm>
-            <a:off x="7554097" y="3739978"/>
-            <a:ext cx="914400" cy="914400"/>
-          </a:xfrm>
-          <a:prstGeom prst="rect">
-            <a:avLst/>
-          </a:prstGeom>
-          <a:effectLst>
-            <a:outerShdw blurRad="50800" dist="38100" dir="16200000" rotWithShape="0">
-              <a:prstClr val="black">
-                <a:alpha val="40000"/>
-              </a:prstClr>
-            </a:outerShdw>
-          </a:effectLst>
-        </p:spPr>
-      </p:pic>
-      <p:cxnSp>
-        <p:nvCxnSpPr>
-          <p:cNvPr id="25" name="Straight Connector 24">
-            <a:extLst>
-              <a:ext uri="{FF2B5EF4-FFF2-40B4-BE49-F238E27FC236}">
-                <a16:creationId xmlns:a16="http://schemas.microsoft.com/office/drawing/2014/main" id="{66F28968-FB5C-4427-ACF0-1C27F06147D1}"/>
-              </a:ext>
-            </a:extLst>
-          </p:cNvPr>
-          <p:cNvCxnSpPr/>
-          <p:nvPr/>
-        </p:nvCxnSpPr>
-        <p:spPr>
-          <a:xfrm flipV="1">
-            <a:off x="6763265" y="3937686"/>
-            <a:ext cx="716692" cy="259492"/>
-          </a:xfrm>
-          <a:prstGeom prst="line">
-            <a:avLst/>
-          </a:prstGeom>
-          <a:ln w="76200">
-            <a:solidFill>
-              <a:srgbClr val="FF0000"/>
-            </a:solidFill>
-            <a:prstDash val="dash"/>
-          </a:ln>
-        </p:spPr>
-        <p:style>
-          <a:lnRef idx="1">
-            <a:schemeClr val="accent1"/>
-          </a:lnRef>
-          <a:fillRef idx="0">
-            <a:schemeClr val="accent1"/>
-          </a:fillRef>
-          <a:effectRef idx="0">
-            <a:schemeClr val="accent1"/>
-          </a:effectRef>
-          <a:fontRef idx="minor">
-            <a:schemeClr val="tx1"/>
-          </a:fontRef>
-        </p:style>
-      </p:cxnSp>
-    </p:spTree>
-    <p:extLst>
-      <p:ext uri="{BB962C8B-B14F-4D97-AF65-F5344CB8AC3E}">
-        <p14:creationId xmlns:p14="http://schemas.microsoft.com/office/powerpoint/2010/main" val="1376799312"/>
-      </p:ext>
-    </p:extLst>
-  </p:cSld>
-  <p:clrMapOvr>
-    <a:masterClrMapping/>
-  </p:clrMapOvr>
-  <mc:AlternateContent xmlns:mc="http://schemas.openxmlformats.org/markup-compatibility/2006" xmlns:p159="http://schemas.microsoft.com/office/powerpoint/2015/09/main">
-    <mc:Choice Requires="p159">
-      <p:transition xmlns:p14="http://schemas.microsoft.com/office/powerpoint/2010/main" spd="slow" p14:dur="2000">
-        <p159:morph option="byObject"/>
-      </p:transition>
-    </mc:Choice>
-    <mc:Fallback xmlns="">
-      <p:transition spd="slow">
-        <p:fade/>
-      </p:transition>
-    </mc:Fallback>
-  </mc:AlternateContent>
-</p:sld>
-</file>
-
-<file path=ppt/slides/slide8.xml><?xml version="1.0" encoding="utf-8"?>
-<p:sld xmlns:a="http://schemas.openxmlformats.org/drawingml/2006/main" xmlns:r="http://schemas.openxmlformats.org/officeDocument/2006/relationships" xmlns:p="http://schemas.openxmlformats.org/presentationml/2006/main">
-  <p:cSld>
-    <p:spTree>
-      <p:nvGrpSpPr>
-        <p:cNvPr id="1" name=""/>
-        <p:cNvGrpSpPr/>
-        <p:nvPr/>
-      </p:nvGrpSpPr>
-      <p:grpSpPr>
-        <a:xfrm>
-          <a:off x="0" y="0"/>
-          <a:ext cx="0" cy="0"/>
-          <a:chOff x="0" y="0"/>
-          <a:chExt cx="0" cy="0"/>
-        </a:xfrm>
-      </p:grpSpPr>
-      <p:sp>
-        <p:nvSpPr>
-          <p:cNvPr id="3" name="Title 2">
-            <a:extLst>
-              <a:ext uri="{FF2B5EF4-FFF2-40B4-BE49-F238E27FC236}">
-                <a16:creationId xmlns:a16="http://schemas.microsoft.com/office/drawing/2014/main" id="{E3EA8F3D-5E80-47FC-B604-B77B30D5F33E}"/>
-              </a:ext>
-            </a:extLst>
-          </p:cNvPr>
-          <p:cNvSpPr>
-            <a:spLocks noGrp="1"/>
-          </p:cNvSpPr>
-          <p:nvPr>
-            <p:ph type="title"/>
-          </p:nvPr>
-        </p:nvSpPr>
-        <p:spPr>
-          <a:xfrm>
-            <a:off x="500446" y="400840"/>
-            <a:ext cx="6526336" cy="826598"/>
-          </a:xfrm>
-        </p:spPr>
-        <p:txBody>
-          <a:bodyPr/>
-          <a:lstStyle/>
-          <a:p>
-            <a:r>
-              <a:rPr lang="en-US" sz="4800" dirty="0">
-                <a:latin typeface="Calibri" panose="020F0502020204030204" pitchFamily="34" charset="0"/>
-                <a:cs typeface="Calibri" panose="020F0502020204030204" pitchFamily="34" charset="0"/>
-              </a:rPr>
-              <a:t>IoT</a:t>
-            </a:r>
-          </a:p>
-        </p:txBody>
-      </p:sp>
-      <p:pic>
-        <p:nvPicPr>
-          <p:cNvPr id="4" name="Picture 3" descr="A close up of a sign&#10;&#10;Description generated with high confidence">
-            <a:extLst>
-              <a:ext uri="{FF2B5EF4-FFF2-40B4-BE49-F238E27FC236}">
-                <a16:creationId xmlns:a16="http://schemas.microsoft.com/office/drawing/2014/main" id="{CD43DD65-D872-4793-A99C-92D52F284DC5}"/>
-              </a:ext>
-            </a:extLst>
-          </p:cNvPr>
-          <p:cNvPicPr>
-            <a:picLocks noChangeAspect="1"/>
-          </p:cNvPicPr>
-          <p:nvPr/>
-        </p:nvPicPr>
-        <p:blipFill>
-          <a:blip r:embed="rId2"/>
-          <a:stretch>
-            <a:fillRect/>
-          </a:stretch>
-        </p:blipFill>
-        <p:spPr>
-          <a:xfrm>
-            <a:off x="613463" y="2246614"/>
-            <a:ext cx="834338" cy="834338"/>
-          </a:xfrm>
-          <a:prstGeom prst="rect">
-            <a:avLst/>
-          </a:prstGeom>
-        </p:spPr>
-      </p:pic>
-      <p:pic>
-        <p:nvPicPr>
-          <p:cNvPr id="5" name="Picture 4" descr="A close up of a sign&#10;&#10;Description generated with high confidence">
-            <a:extLst>
-              <a:ext uri="{FF2B5EF4-FFF2-40B4-BE49-F238E27FC236}">
-                <a16:creationId xmlns:a16="http://schemas.microsoft.com/office/drawing/2014/main" id="{E4D0BC29-8BFA-436F-9690-A6ED7D9D7336}"/>
-              </a:ext>
-            </a:extLst>
-          </p:cNvPr>
-          <p:cNvPicPr>
-            <a:picLocks noChangeAspect="1"/>
-          </p:cNvPicPr>
-          <p:nvPr/>
-        </p:nvPicPr>
-        <p:blipFill>
-          <a:blip r:embed="rId2"/>
-          <a:stretch>
-            <a:fillRect/>
-          </a:stretch>
-        </p:blipFill>
-        <p:spPr>
-          <a:xfrm>
-            <a:off x="5440836" y="1951275"/>
-            <a:ext cx="834338" cy="834338"/>
-          </a:xfrm>
-          <a:prstGeom prst="rect">
-            <a:avLst/>
-          </a:prstGeom>
-        </p:spPr>
-      </p:pic>
-      <p:pic>
-        <p:nvPicPr>
-          <p:cNvPr id="6" name="Picture 5" descr="A close up of a sign&#10;&#10;Description generated with high confidence">
-            <a:extLst>
-              <a:ext uri="{FF2B5EF4-FFF2-40B4-BE49-F238E27FC236}">
-                <a16:creationId xmlns:a16="http://schemas.microsoft.com/office/drawing/2014/main" id="{3EC4F6CD-CC88-4CE2-9569-60D2C20EF256}"/>
-              </a:ext>
-            </a:extLst>
-          </p:cNvPr>
-          <p:cNvPicPr>
-            <a:picLocks noChangeAspect="1"/>
-          </p:cNvPicPr>
-          <p:nvPr/>
-        </p:nvPicPr>
-        <p:blipFill>
-          <a:blip r:embed="rId2"/>
-          <a:stretch>
-            <a:fillRect/>
-          </a:stretch>
-        </p:blipFill>
-        <p:spPr>
-          <a:xfrm>
-            <a:off x="3582381" y="4329630"/>
-            <a:ext cx="834338" cy="834338"/>
-          </a:xfrm>
-          <a:prstGeom prst="rect">
-            <a:avLst/>
-          </a:prstGeom>
-        </p:spPr>
-      </p:pic>
-      <p:pic>
-        <p:nvPicPr>
-          <p:cNvPr id="7" name="Picture 6" descr="A close up of a sign&#10;&#10;Description generated with high confidence">
-            <a:extLst>
-              <a:ext uri="{FF2B5EF4-FFF2-40B4-BE49-F238E27FC236}">
-                <a16:creationId xmlns:a16="http://schemas.microsoft.com/office/drawing/2014/main" id="{AC6E4746-6357-4297-B56A-D244BF64E74F}"/>
-              </a:ext>
-            </a:extLst>
-          </p:cNvPr>
-          <p:cNvPicPr>
-            <a:picLocks noChangeAspect="1"/>
-          </p:cNvPicPr>
-          <p:nvPr/>
-        </p:nvPicPr>
-        <p:blipFill>
-          <a:blip r:embed="rId2"/>
-          <a:stretch>
-            <a:fillRect/>
-          </a:stretch>
-        </p:blipFill>
-        <p:spPr>
-          <a:xfrm>
-            <a:off x="5665575" y="4066665"/>
-            <a:ext cx="834338" cy="834338"/>
-          </a:xfrm>
-          <a:prstGeom prst="rect">
-            <a:avLst/>
-          </a:prstGeom>
-        </p:spPr>
-      </p:pic>
-      <p:pic>
-        <p:nvPicPr>
-          <p:cNvPr id="8" name="Picture 7" descr="A close up of a sign&#10;&#10;Description generated with high confidence">
-            <a:extLst>
-              <a:ext uri="{FF2B5EF4-FFF2-40B4-BE49-F238E27FC236}">
-                <a16:creationId xmlns:a16="http://schemas.microsoft.com/office/drawing/2014/main" id="{9E6F5980-C63F-4B1C-B1A7-39E72E4A7E8B}"/>
-              </a:ext>
-            </a:extLst>
-          </p:cNvPr>
-          <p:cNvPicPr>
-            <a:picLocks noChangeAspect="1"/>
-          </p:cNvPicPr>
-          <p:nvPr/>
-        </p:nvPicPr>
-        <p:blipFill>
-          <a:blip r:embed="rId2"/>
-          <a:stretch>
-            <a:fillRect/>
-          </a:stretch>
-        </p:blipFill>
-        <p:spPr>
-          <a:xfrm>
-            <a:off x="1321917" y="4066665"/>
-            <a:ext cx="834338" cy="834338"/>
-          </a:xfrm>
-          <a:prstGeom prst="rect">
-            <a:avLst/>
-          </a:prstGeom>
-        </p:spPr>
-      </p:pic>
-      <p:pic>
-        <p:nvPicPr>
-          <p:cNvPr id="9" name="Picture 8" descr="A close up of a sign&#10;&#10;Description generated with high confidence">
-            <a:extLst>
-              <a:ext uri="{FF2B5EF4-FFF2-40B4-BE49-F238E27FC236}">
-                <a16:creationId xmlns:a16="http://schemas.microsoft.com/office/drawing/2014/main" id="{12FD7EC7-B21A-4F44-957D-19383A3A217A}"/>
-              </a:ext>
-            </a:extLst>
-          </p:cNvPr>
-          <p:cNvPicPr>
-            <a:picLocks noChangeAspect="1"/>
-          </p:cNvPicPr>
-          <p:nvPr/>
-        </p:nvPicPr>
-        <p:blipFill>
-          <a:blip r:embed="rId2"/>
-          <a:stretch>
-            <a:fillRect/>
-          </a:stretch>
-        </p:blipFill>
-        <p:spPr>
-          <a:xfrm>
-            <a:off x="2837680" y="1378167"/>
-            <a:ext cx="834338" cy="834338"/>
-          </a:xfrm>
-          <a:prstGeom prst="rect">
-            <a:avLst/>
-          </a:prstGeom>
-        </p:spPr>
-      </p:pic>
-      <p:sp>
-        <p:nvSpPr>
-          <p:cNvPr id="2" name="Freeform: Shape 1">
-            <a:extLst>
-              <a:ext uri="{FF2B5EF4-FFF2-40B4-BE49-F238E27FC236}">
-                <a16:creationId xmlns:a16="http://schemas.microsoft.com/office/drawing/2014/main" id="{C99DFEC3-7CC7-41D0-BA42-8CC9B36E39D1}"/>
-              </a:ext>
-            </a:extLst>
-          </p:cNvPr>
-          <p:cNvSpPr/>
-          <p:nvPr/>
-        </p:nvSpPr>
-        <p:spPr>
-          <a:xfrm>
-            <a:off x="1252151" y="1565189"/>
-            <a:ext cx="1285103" cy="345989"/>
-          </a:xfrm>
-          <a:custGeom>
-            <a:avLst/>
-            <a:gdLst>
-              <a:gd name="connsiteX0" fmla="*/ 0 w 1285103"/>
-              <a:gd name="connsiteY0" fmla="*/ 345989 h 345989"/>
-              <a:gd name="connsiteX1" fmla="*/ 1285103 w 1285103"/>
-              <a:gd name="connsiteY1" fmla="*/ 0 h 345989"/>
-              <a:gd name="connsiteX2" fmla="*/ 1285103 w 1285103"/>
-              <a:gd name="connsiteY2" fmla="*/ 0 h 345989"/>
-            </a:gdLst>
-            <a:ahLst/>
-            <a:cxnLst>
-              <a:cxn ang="0">
-                <a:pos x="connsiteX0" y="connsiteY0"/>
-              </a:cxn>
-              <a:cxn ang="0">
-                <a:pos x="connsiteX1" y="connsiteY1"/>
-              </a:cxn>
-              <a:cxn ang="0">
-                <a:pos x="connsiteX2" y="connsiteY2"/>
-              </a:cxn>
-            </a:cxnLst>
-            <a:rect l="l" t="t" r="r" b="b"/>
-            <a:pathLst>
-              <a:path w="1285103" h="345989">
-                <a:moveTo>
-                  <a:pt x="0" y="345989"/>
-                </a:moveTo>
-                <a:lnTo>
-                  <a:pt x="1285103" y="0"/>
-                </a:lnTo>
-                <a:lnTo>
-                  <a:pt x="1285103" y="0"/>
-                </a:lnTo>
-              </a:path>
-            </a:pathLst>
-          </a:custGeom>
-          <a:noFill/>
-          <a:ln w="57150">
-            <a:solidFill>
-              <a:schemeClr val="accent3"/>
-            </a:solidFill>
-            <a:prstDash val="dash"/>
-          </a:ln>
-        </p:spPr>
-        <p:style>
-          <a:lnRef idx="2">
-            <a:schemeClr val="accent1">
-              <a:shade val="50000"/>
-            </a:schemeClr>
-          </a:lnRef>
-          <a:fillRef idx="1">
-            <a:schemeClr val="accent1"/>
-          </a:fillRef>
-          <a:effectRef idx="0">
-            <a:schemeClr val="accent1"/>
-          </a:effectRef>
-          <a:fontRef idx="minor">
-            <a:schemeClr val="lt1"/>
-          </a:fontRef>
-        </p:style>
-        <p:txBody>
-          <a:bodyPr rtlCol="0" anchor="ctr"/>
-          <a:lstStyle/>
-          <a:p>
-            <a:pPr algn="ctr"/>
-            <a:endParaRPr lang="en-US"/>
-          </a:p>
-        </p:txBody>
-      </p:sp>
-      <p:cxnSp>
-        <p:nvCxnSpPr>
-          <p:cNvPr id="11" name="Straight Connector 10">
-            <a:extLst>
-              <a:ext uri="{FF2B5EF4-FFF2-40B4-BE49-F238E27FC236}">
-                <a16:creationId xmlns:a16="http://schemas.microsoft.com/office/drawing/2014/main" id="{DC14B478-832B-439F-AA0A-FC7CFFB95DBF}"/>
-              </a:ext>
-            </a:extLst>
-          </p:cNvPr>
-          <p:cNvCxnSpPr/>
-          <p:nvPr/>
-        </p:nvCxnSpPr>
-        <p:spPr>
-          <a:xfrm flipH="1">
-            <a:off x="1853514" y="2339546"/>
-            <a:ext cx="1210962" cy="1458097"/>
-          </a:xfrm>
-          <a:prstGeom prst="line">
-            <a:avLst/>
-          </a:prstGeom>
-          <a:ln w="76200">
-            <a:solidFill>
-              <a:srgbClr val="FF0000"/>
-            </a:solidFill>
-            <a:prstDash val="dash"/>
-          </a:ln>
-        </p:spPr>
-        <p:style>
-          <a:lnRef idx="1">
-            <a:schemeClr val="accent1"/>
-          </a:lnRef>
-          <a:fillRef idx="0">
-            <a:schemeClr val="accent1"/>
-          </a:fillRef>
-          <a:effectRef idx="0">
-            <a:schemeClr val="accent1"/>
-          </a:effectRef>
-          <a:fontRef idx="minor">
-            <a:schemeClr val="tx1"/>
-          </a:fontRef>
-        </p:style>
-      </p:cxnSp>
-      <p:cxnSp>
-        <p:nvCxnSpPr>
-          <p:cNvPr id="13" name="Straight Connector 12">
-            <a:extLst>
-              <a:ext uri="{FF2B5EF4-FFF2-40B4-BE49-F238E27FC236}">
-                <a16:creationId xmlns:a16="http://schemas.microsoft.com/office/drawing/2014/main" id="{405CF20C-7733-47B0-BAC5-EFD6BD497568}"/>
-              </a:ext>
-            </a:extLst>
-          </p:cNvPr>
-          <p:cNvCxnSpPr/>
-          <p:nvPr/>
-        </p:nvCxnSpPr>
-        <p:spPr>
-          <a:xfrm>
-            <a:off x="2273643" y="4456670"/>
-            <a:ext cx="1210962" cy="205946"/>
-          </a:xfrm>
-          <a:prstGeom prst="line">
-            <a:avLst/>
-          </a:prstGeom>
-          <a:ln w="76200">
-            <a:solidFill>
-              <a:srgbClr val="FF0000"/>
-            </a:solidFill>
-            <a:prstDash val="dash"/>
-          </a:ln>
-        </p:spPr>
-        <p:style>
-          <a:lnRef idx="1">
-            <a:schemeClr val="accent1"/>
-          </a:lnRef>
-          <a:fillRef idx="0">
-            <a:schemeClr val="accent1"/>
-          </a:fillRef>
-          <a:effectRef idx="0">
-            <a:schemeClr val="accent1"/>
-          </a:effectRef>
-          <a:fontRef idx="minor">
-            <a:schemeClr val="tx1"/>
-          </a:fontRef>
-        </p:style>
-      </p:cxnSp>
-      <p:cxnSp>
-        <p:nvCxnSpPr>
-          <p:cNvPr id="19" name="Straight Connector 18">
-            <a:extLst>
-              <a:ext uri="{FF2B5EF4-FFF2-40B4-BE49-F238E27FC236}">
-                <a16:creationId xmlns:a16="http://schemas.microsoft.com/office/drawing/2014/main" id="{C435040B-9E12-4C41-95BD-449DABEA9823}"/>
-              </a:ext>
-            </a:extLst>
-          </p:cNvPr>
-          <p:cNvCxnSpPr/>
-          <p:nvPr/>
-        </p:nvCxnSpPr>
-        <p:spPr>
-          <a:xfrm flipV="1">
-            <a:off x="4852086" y="4329630"/>
-            <a:ext cx="691979" cy="217656"/>
-          </a:xfrm>
-          <a:prstGeom prst="line">
-            <a:avLst/>
-          </a:prstGeom>
-          <a:ln w="76200">
-            <a:solidFill>
-              <a:srgbClr val="FF0000"/>
-            </a:solidFill>
-            <a:prstDash val="dash"/>
-          </a:ln>
-        </p:spPr>
-        <p:style>
-          <a:lnRef idx="1">
-            <a:schemeClr val="accent1"/>
-          </a:lnRef>
-          <a:fillRef idx="0">
-            <a:schemeClr val="accent1"/>
-          </a:fillRef>
-          <a:effectRef idx="0">
-            <a:schemeClr val="accent1"/>
-          </a:effectRef>
-          <a:fontRef idx="minor">
-            <a:schemeClr val="tx1"/>
-          </a:fontRef>
-        </p:style>
-      </p:cxnSp>
-      <p:cxnSp>
-        <p:nvCxnSpPr>
-          <p:cNvPr id="21" name="Straight Connector 20">
-            <a:extLst>
-              <a:ext uri="{FF2B5EF4-FFF2-40B4-BE49-F238E27FC236}">
-                <a16:creationId xmlns:a16="http://schemas.microsoft.com/office/drawing/2014/main" id="{DA75733B-58CA-4974-8251-2B4F5887E571}"/>
-              </a:ext>
-            </a:extLst>
-          </p:cNvPr>
-          <p:cNvCxnSpPr/>
-          <p:nvPr/>
-        </p:nvCxnSpPr>
-        <p:spPr>
-          <a:xfrm>
-            <a:off x="5988908" y="2899719"/>
-            <a:ext cx="0" cy="897924"/>
-          </a:xfrm>
-          <a:prstGeom prst="line">
-            <a:avLst/>
-          </a:prstGeom>
-          <a:ln w="76200">
-            <a:solidFill>
-              <a:srgbClr val="FF0000"/>
-            </a:solidFill>
-            <a:prstDash val="dash"/>
-          </a:ln>
-        </p:spPr>
-        <p:style>
-          <a:lnRef idx="1">
-            <a:schemeClr val="accent1"/>
-          </a:lnRef>
-          <a:fillRef idx="0">
-            <a:schemeClr val="accent1"/>
-          </a:fillRef>
-          <a:effectRef idx="0">
-            <a:schemeClr val="accent1"/>
-          </a:effectRef>
-          <a:fontRef idx="minor">
-            <a:schemeClr val="tx1"/>
-          </a:fontRef>
-        </p:style>
-      </p:cxnSp>
-      <p:pic>
-        <p:nvPicPr>
-          <p:cNvPr id="23" name="Graphic 22" descr="Laptop">
-            <a:extLst>
-              <a:ext uri="{FF2B5EF4-FFF2-40B4-BE49-F238E27FC236}">
-                <a16:creationId xmlns:a16="http://schemas.microsoft.com/office/drawing/2014/main" id="{BEF0786E-4BC7-4B5F-ACBE-97A937181652}"/>
-              </a:ext>
-            </a:extLst>
-          </p:cNvPr>
-          <p:cNvPicPr>
-            <a:picLocks noChangeAspect="1"/>
-          </p:cNvPicPr>
-          <p:nvPr/>
-        </p:nvPicPr>
-        <p:blipFill>
-          <a:blip r:embed="rId3">
-            <a:extLst>
-              <a:ext uri="{96DAC541-7B7A-43D3-8B79-37D633B846F1}">
-                <asvg:svgBlip xmlns:asvg="http://schemas.microsoft.com/office/drawing/2016/SVG/main" r:embed="rId4"/>
-              </a:ext>
-            </a:extLst>
-          </a:blip>
-          <a:stretch>
-            <a:fillRect/>
-          </a:stretch>
-        </p:blipFill>
-        <p:spPr>
-          <a:xfrm>
-            <a:off x="7554097" y="3739978"/>
-            <a:ext cx="914400" cy="914400"/>
-          </a:xfrm>
-          <a:prstGeom prst="rect">
-            <a:avLst/>
-          </a:prstGeom>
-          <a:effectLst>
-            <a:outerShdw blurRad="50800" dist="38100" dir="16200000" rotWithShape="0">
-              <a:prstClr val="black">
-                <a:alpha val="40000"/>
-              </a:prstClr>
-            </a:outerShdw>
-          </a:effectLst>
-        </p:spPr>
-      </p:pic>
-      <p:cxnSp>
-        <p:nvCxnSpPr>
-          <p:cNvPr id="25" name="Straight Connector 24">
-            <a:extLst>
-              <a:ext uri="{FF2B5EF4-FFF2-40B4-BE49-F238E27FC236}">
-                <a16:creationId xmlns:a16="http://schemas.microsoft.com/office/drawing/2014/main" id="{66F28968-FB5C-4427-ACF0-1C27F06147D1}"/>
-              </a:ext>
-            </a:extLst>
-          </p:cNvPr>
-          <p:cNvCxnSpPr/>
-          <p:nvPr/>
-        </p:nvCxnSpPr>
-        <p:spPr>
-          <a:xfrm flipV="1">
-            <a:off x="6763265" y="3937686"/>
-            <a:ext cx="716692" cy="259492"/>
-          </a:xfrm>
-          <a:prstGeom prst="line">
-            <a:avLst/>
-          </a:prstGeom>
-          <a:ln w="76200">
-            <a:solidFill>
-              <a:srgbClr val="FF0000"/>
-            </a:solidFill>
-            <a:prstDash val="dash"/>
-          </a:ln>
-        </p:spPr>
-        <p:style>
-          <a:lnRef idx="1">
-            <a:schemeClr val="accent1"/>
-          </a:lnRef>
-          <a:fillRef idx="0">
-            <a:schemeClr val="accent1"/>
-          </a:fillRef>
-          <a:effectRef idx="0">
-            <a:schemeClr val="accent1"/>
-          </a:effectRef>
-          <a:fontRef idx="minor">
-            <a:schemeClr val="tx1"/>
-          </a:fontRef>
-        </p:style>
-      </p:cxnSp>
-    </p:spTree>
-    <p:extLst>
-      <p:ext uri="{BB962C8B-B14F-4D97-AF65-F5344CB8AC3E}">
-        <p14:creationId xmlns:p14="http://schemas.microsoft.com/office/powerpoint/2010/main" val="2531974433"/>
-      </p:ext>
-    </p:extLst>
-  </p:cSld>
-  <p:clrMapOvr>
-    <a:masterClrMapping/>
-  </p:clrMapOvr>
-  <mc:AlternateContent xmlns:mc="http://schemas.openxmlformats.org/markup-compatibility/2006" xmlns:p159="http://schemas.microsoft.com/office/powerpoint/2015/09/main">
-    <mc:Choice Requires="p159">
-      <p:transition xmlns:p14="http://schemas.microsoft.com/office/powerpoint/2010/main" spd="slow" p14:dur="2000">
-        <p159:morph option="byObject"/>
-      </p:transition>
-    </mc:Choice>
-    <mc:Fallback xmlns="">
-      <p:transition spd="slow">
-        <p:fade/>
-      </p:transition>
-    </mc:Fallback>
-  </mc:AlternateContent>
-</p:sld>
-</file>
-
-<file path=ppt/slides/slide9.xml><?xml version="1.0" encoding="utf-8"?>
-<p:sld xmlns:a="http://schemas.openxmlformats.org/drawingml/2006/main" xmlns:r="http://schemas.openxmlformats.org/officeDocument/2006/relationships" xmlns:p="http://schemas.openxmlformats.org/presentationml/2006/main">
-  <p:cSld>
-    <p:spTree>
-      <p:nvGrpSpPr>
-        <p:cNvPr id="1" name=""/>
-        <p:cNvGrpSpPr/>
-        <p:nvPr/>
-      </p:nvGrpSpPr>
-      <p:grpSpPr>
-        <a:xfrm>
-          <a:off x="0" y="0"/>
-          <a:ext cx="0" cy="0"/>
-          <a:chOff x="0" y="0"/>
-          <a:chExt cx="0" cy="0"/>
-        </a:xfrm>
-      </p:grpSpPr>
-      <p:sp>
-        <p:nvSpPr>
-          <p:cNvPr id="3" name="Title 2"/>
-          <p:cNvSpPr>
-            <a:spLocks noGrp="1"/>
-          </p:cNvSpPr>
-          <p:nvPr>
-            <p:ph type="title"/>
-          </p:nvPr>
-        </p:nvSpPr>
-        <p:spPr>
-          <a:xfrm>
-            <a:off x="159603" y="374024"/>
-            <a:ext cx="7569812" cy="868622"/>
-          </a:xfrm>
-        </p:spPr>
-        <p:txBody>
-          <a:bodyPr/>
-          <a:lstStyle/>
-          <a:p>
-            <a:r>
-              <a:rPr lang="en-IN" sz="4000" dirty="0">
-                <a:latin typeface="Calibri" panose="020F0502020204030204" pitchFamily="34" charset="0"/>
-                <a:cs typeface="Calibri" panose="020F0502020204030204" pitchFamily="34" charset="0"/>
-              </a:rPr>
-              <a:t>In this Course</a:t>
-            </a:r>
-          </a:p>
-        </p:txBody>
-      </p:sp>
-      <p:sp>
-        <p:nvSpPr>
-          <p:cNvPr id="2" name="Content Placeholder 1"/>
-          <p:cNvSpPr>
-            <a:spLocks noGrp="1"/>
-          </p:cNvSpPr>
-          <p:nvPr>
-            <p:ph idx="1"/>
-          </p:nvPr>
-        </p:nvSpPr>
-        <p:spPr>
-          <a:xfrm>
-            <a:off x="159603" y="1383125"/>
-            <a:ext cx="8833823" cy="5010209"/>
-          </a:xfrm>
-        </p:spPr>
-        <p:txBody>
-          <a:bodyPr>
-            <a:normAutofit/>
-          </a:bodyPr>
-          <a:lstStyle/>
-          <a:p>
-            <a:pPr marL="228600" lvl="0" indent="-228600" defTabSz="685800">
-              <a:lnSpc>
-                <a:spcPct val="200000"/>
-              </a:lnSpc>
-              <a:spcBef>
-                <a:spcPts val="700"/>
-              </a:spcBef>
-              <a:buClr>
-                <a:srgbClr val="0B082E"/>
-              </a:buClr>
-              <a:buFont typeface="Arial" panose="020B0604020202020204" pitchFamily="34" charset="0"/>
-              <a:buChar char="•"/>
-            </a:pPr>
-            <a:r>
-              <a:rPr lang="en-IN" sz="2400" kern="1200" dirty="0">
-                <a:solidFill>
-                  <a:prstClr val="black">
-                    <a:lumMod val="65000"/>
-                    <a:lumOff val="35000"/>
-                  </a:prstClr>
-                </a:solidFill>
-                <a:latin typeface="Gill Sans MT" panose="020B0502020104020203"/>
-                <a:ea typeface="+mn-ea"/>
-                <a:cs typeface="+mn-cs"/>
-              </a:rPr>
-              <a:t>Wireless Sensor Networks</a:t>
-            </a:r>
-          </a:p>
-          <a:p>
-            <a:pPr marL="228600" lvl="0" indent="-228600" defTabSz="685800">
-              <a:lnSpc>
-                <a:spcPct val="200000"/>
-              </a:lnSpc>
-              <a:spcBef>
-                <a:spcPts val="700"/>
-              </a:spcBef>
-              <a:buClr>
-                <a:srgbClr val="0B082E"/>
-              </a:buClr>
-              <a:buFont typeface="Arial" panose="020B0604020202020204" pitchFamily="34" charset="0"/>
-              <a:buChar char="•"/>
-            </a:pPr>
-            <a:r>
-              <a:rPr lang="en-IN" sz="2400" kern="1200" dirty="0">
-                <a:solidFill>
-                  <a:prstClr val="black">
-                    <a:lumMod val="65000"/>
-                    <a:lumOff val="35000"/>
-                  </a:prstClr>
-                </a:solidFill>
-                <a:latin typeface="Gill Sans MT" panose="020B0502020104020203"/>
-                <a:ea typeface="+mn-ea"/>
-                <a:cs typeface="+mn-cs"/>
-              </a:rPr>
-              <a:t>Industrial automation / Home Automation</a:t>
-            </a:r>
-          </a:p>
-          <a:p>
-            <a:pPr marL="228600" lvl="0" indent="-228600" defTabSz="685800">
-              <a:lnSpc>
-                <a:spcPct val="200000"/>
-              </a:lnSpc>
-              <a:spcBef>
-                <a:spcPts val="700"/>
-              </a:spcBef>
-              <a:buClr>
-                <a:srgbClr val="0B082E"/>
-              </a:buClr>
-              <a:buFont typeface="Arial" panose="020B0604020202020204" pitchFamily="34" charset="0"/>
-              <a:buChar char="•"/>
-            </a:pPr>
-            <a:r>
-              <a:rPr lang="en-IN" sz="2400" kern="1200" dirty="0">
-                <a:solidFill>
-                  <a:prstClr val="black">
-                    <a:lumMod val="65000"/>
-                    <a:lumOff val="35000"/>
-                  </a:prstClr>
-                </a:solidFill>
-                <a:latin typeface="Gill Sans MT" panose="020B0502020104020203"/>
-                <a:ea typeface="+mn-ea"/>
-                <a:cs typeface="+mn-cs"/>
-              </a:rPr>
-              <a:t>Automotive Networked Embedded Systems</a:t>
-            </a:r>
-          </a:p>
-          <a:p>
-            <a:pPr marL="228600" lvl="0" indent="-228600" defTabSz="685800">
-              <a:lnSpc>
-                <a:spcPct val="110000"/>
-              </a:lnSpc>
-              <a:spcBef>
-                <a:spcPts val="700"/>
-              </a:spcBef>
-              <a:buClr>
-                <a:srgbClr val="0B082E"/>
-              </a:buClr>
-              <a:buFont typeface="Arial" panose="020B0604020202020204" pitchFamily="34" charset="0"/>
-              <a:buChar char="•"/>
-            </a:pPr>
-            <a:endParaRPr lang="en-IN" dirty="0"/>
-          </a:p>
-        </p:txBody>
-      </p:sp>
-    </p:spTree>
-    <p:extLst>
-      <p:ext uri="{BB962C8B-B14F-4D97-AF65-F5344CB8AC3E}">
-        <p14:creationId xmlns:p14="http://schemas.microsoft.com/office/powerpoint/2010/main" val="1634897071"/>
-      </p:ext>
-    </p:extLst>
-  </p:cSld>
-  <p:clrMapOvr>
-    <a:masterClrMapping/>
-  </p:clrMapOvr>
-  <p:timing>
-    <p:tnLst>
-      <p:par>
-        <p:cTn id="1" dur="indefinite" restart="never" nodeType="tmRoot">
-          <p:childTnLst>
-            <p:seq concurrent="1" nextAc="seek">
-              <p:cTn id="2" dur="indefinite" nodeType="mainSeq">
-                <p:childTnLst>
-                  <p:par>
-                    <p:cTn id="3" fill="hold">
-                      <p:stCondLst>
-                        <p:cond delay="indefinite"/>
-                      </p:stCondLst>
-                      <p:childTnLst>
-                        <p:par>
-                          <p:cTn id="4" fill="hold">
-                            <p:stCondLst>
-                              <p:cond delay="0"/>
-                            </p:stCondLst>
-                            <p:childTnLst>
-                              <p:par>
-                                <p:cTn id="5" presetID="18" presetClass="emph" presetSubtype="0" fill="hold" nodeType="clickEffect">
-                                  <p:stCondLst>
-                                    <p:cond delay="0"/>
-                                  </p:stCondLst>
-                                  <p:iterate type="lt">
-                                    <p:tmPct val="4000"/>
-                                  </p:iterate>
-                                  <p:childTnLst>
-                                    <p:set>
-                                      <p:cBhvr override="childStyle">
-                                        <p:cTn id="6" dur="500" fill="hold"/>
-                                        <p:tgtEl>
-                                          <p:spTgt spid="2">
-                                            <p:txEl>
-                                              <p:pRg st="0" end="0"/>
-                                            </p:txEl>
-                                          </p:spTgt>
-                                        </p:tgtEl>
-                                        <p:attrNameLst>
-                                          <p:attrName>style.textDecorationUnderline</p:attrName>
-                                        </p:attrNameLst>
-                                      </p:cBhvr>
-                                      <p:to>
-                                        <p:strVal val="true"/>
-                                      </p:to>
-                                    </p:set>
-                                  </p:childTnLst>
-                                </p:cTn>
-                              </p:par>
-                            </p:childTnLst>
-                          </p:cTn>
-                        </p:par>
-                      </p:childTnLst>
-                    </p:cTn>
-                  </p:par>
-                  <p:par>
-                    <p:cTn id="7" fill="hold">
-                      <p:stCondLst>
-                        <p:cond delay="indefinite"/>
-                      </p:stCondLst>
-                      <p:childTnLst>
-                        <p:par>
-                          <p:cTn id="8" fill="hold">
-                            <p:stCondLst>
-                              <p:cond delay="0"/>
-                            </p:stCondLst>
-                            <p:childTnLst>
-                              <p:par>
-                                <p:cTn id="9" presetID="18" presetClass="emph" presetSubtype="0" fill="hold" nodeType="clickEffect">
-                                  <p:stCondLst>
-                                    <p:cond delay="0"/>
-                                  </p:stCondLst>
-                                  <p:iterate type="lt">
-                                    <p:tmPct val="4000"/>
-                                  </p:iterate>
-                                  <p:childTnLst>
-                                    <p:set>
-                                      <p:cBhvr override="childStyle">
-                                        <p:cTn id="10" dur="500" fill="hold"/>
-                                        <p:tgtEl>
-                                          <p:spTgt spid="2">
-                                            <p:txEl>
-                                              <p:pRg st="1" end="1"/>
-                                            </p:txEl>
-                                          </p:spTgt>
-                                        </p:tgtEl>
-                                        <p:attrNameLst>
-                                          <p:attrName>style.textDecorationUnderline</p:attrName>
-                                        </p:attrNameLst>
-                                      </p:cBhvr>
-                                      <p:to>
-                                        <p:strVal val="true"/>
-                                      </p:to>
-                                    </p:set>
-                                  </p:childTnLst>
-                                </p:cTn>
-                              </p:par>
-                            </p:childTnLst>
-                          </p:cTn>
-                        </p:par>
-                      </p:childTnLst>
-                    </p:cTn>
-                  </p:par>
-                  <p:par>
-                    <p:cTn id="11" fill="hold">
-                      <p:stCondLst>
-                        <p:cond delay="indefinite"/>
-                      </p:stCondLst>
-                      <p:childTnLst>
-                        <p:par>
-                          <p:cTn id="12" fill="hold">
-                            <p:stCondLst>
-                              <p:cond delay="0"/>
-                            </p:stCondLst>
-                            <p:childTnLst>
-                              <p:par>
-                                <p:cTn id="13" presetID="18" presetClass="emph" presetSubtype="0" fill="hold" nodeType="clickEffect">
-                                  <p:stCondLst>
-                                    <p:cond delay="0"/>
-                                  </p:stCondLst>
-                                  <p:iterate type="lt">
-                                    <p:tmPct val="4000"/>
-                                  </p:iterate>
-                                  <p:childTnLst>
-                                    <p:set>
-                                      <p:cBhvr override="childStyle">
-                                        <p:cTn id="14" dur="500" fill="hold"/>
-                                        <p:tgtEl>
-                                          <p:spTgt spid="2">
-                                            <p:txEl>
-                                              <p:pRg st="2" end="2"/>
                                             </p:txEl>
                                           </p:spTgt>
                                         </p:tgtEl>
